--- a/Exams/CSC175  Sp26 Midterm Sample Questions.pptx
+++ b/Exams/CSC175  Sp26 Midterm Sample Questions.pptx
@@ -1458,6 +1458,91 @@
 </p:notes>
 </file>
 
+<file path=ppt/notesSlides/notesSlide4.xml><?xml version="1.0" encoding="utf-8"?>
+<p:notes xmlns:a="http://schemas.openxmlformats.org/drawingml/2006/main" xmlns:r="http://schemas.openxmlformats.org/officeDocument/2006/relationships" xmlns:p="http://schemas.openxmlformats.org/presentationml/2006/main">
+  <p:cSld>
+    <p:spTree>
+      <p:nvGrpSpPr>
+        <p:cNvPr id="1" name=""/>
+        <p:cNvGrpSpPr/>
+        <p:nvPr/>
+      </p:nvGrpSpPr>
+      <p:grpSpPr>
+        <a:xfrm>
+          <a:off x="0" y="0"/>
+          <a:ext cx="0" cy="0"/>
+          <a:chOff x="0" y="0"/>
+          <a:chExt cx="0" cy="0"/>
+        </a:xfrm>
+      </p:grpSpPr>
+      <p:sp>
+        <p:nvSpPr>
+          <p:cNvPr id="2" name="Slide Image Placeholder 1"/>
+          <p:cNvSpPr>
+            <a:spLocks noGrp="1" noRot="1" noChangeAspect="1"/>
+          </p:cNvSpPr>
+          <p:nvPr>
+            <p:ph type="sldImg"/>
+          </p:nvPr>
+        </p:nvSpPr>
+        <p:spPr/>
+      </p:sp>
+      <p:sp>
+        <p:nvSpPr>
+          <p:cNvPr id="3" name="Notes Placeholder 2"/>
+          <p:cNvSpPr>
+            <a:spLocks noGrp="1"/>
+          </p:cNvSpPr>
+          <p:nvPr>
+            <p:ph type="body" idx="1"/>
+          </p:nvPr>
+        </p:nvSpPr>
+        <p:spPr/>
+        <p:txBody>
+          <a:bodyPr/>
+          <a:lstStyle/>
+          <a:p>
+            <a:endParaRPr lang="zh-CN" altLang="en-US" dirty="0"/>
+          </a:p>
+        </p:txBody>
+      </p:sp>
+      <p:sp>
+        <p:nvSpPr>
+          <p:cNvPr id="4" name="Slide Number Placeholder 3"/>
+          <p:cNvSpPr>
+            <a:spLocks noGrp="1"/>
+          </p:cNvSpPr>
+          <p:nvPr>
+            <p:ph type="sldNum" sz="quarter" idx="5"/>
+          </p:nvPr>
+        </p:nvSpPr>
+        <p:spPr/>
+        <p:txBody>
+          <a:bodyPr/>
+          <a:lstStyle/>
+          <a:p>
+            <a:fld id="{2D71AD5F-E36F-46B9-A99B-7B025244359D}" type="slidenum">
+              <a:rPr lang="en-US" smtClean="0"/>
+              <a:pPr/>
+              <a:t>18</a:t>
+            </a:fld>
+            <a:endParaRPr lang="en-US"/>
+          </a:p>
+        </p:txBody>
+      </p:sp>
+    </p:spTree>
+    <p:extLst>
+      <p:ext uri="{BB962C8B-B14F-4D97-AF65-F5344CB8AC3E}">
+        <p14:creationId xmlns:p14="http://schemas.microsoft.com/office/powerpoint/2010/main" val="3822595816"/>
+      </p:ext>
+    </p:extLst>
+  </p:cSld>
+  <p:clrMapOvr>
+    <a:masterClrMapping/>
+  </p:clrMapOvr>
+</p:notes>
+</file>
+
 <file path=ppt/slideLayouts/slideLayout1.xml><?xml version="1.0" encoding="utf-8"?>
 <p:sldLayout xmlns:a="http://schemas.openxmlformats.org/drawingml/2006/main" xmlns:r="http://schemas.openxmlformats.org/officeDocument/2006/relationships" xmlns:p="http://schemas.openxmlformats.org/presentationml/2006/main" showMasterSp="0" type="title" preserve="1">
   <p:cSld name="Title Slide">
@@ -5393,7 +5478,7 @@
         <p:spPr>
           <a:xfrm>
             <a:off x="609600" y="1219200"/>
-            <a:ext cx="5791200" cy="5137150"/>
+            <a:ext cx="6114938" cy="5137150"/>
           </a:xfrm>
         </p:spPr>
         <p:txBody>
@@ -5467,8 +5552,8 @@
         </p:blipFill>
         <p:spPr>
           <a:xfrm>
-            <a:off x="6248400" y="1752600"/>
-            <a:ext cx="5864832" cy="3068519"/>
+            <a:off x="6724538" y="1752601"/>
+            <a:ext cx="5388693" cy="2819400"/>
           </a:xfrm>
           <a:prstGeom prst="rect">
             <a:avLst/>
@@ -5588,22 +5673,22 @@
         </p:nvSpPr>
         <p:spPr>
           <a:xfrm>
-            <a:off x="609600" y="1219200"/>
-            <a:ext cx="5791200" cy="5181600"/>
+            <a:off x="609600" y="1143000"/>
+            <a:ext cx="6477000" cy="5638800"/>
           </a:xfrm>
         </p:spPr>
         <p:txBody>
           <a:bodyPr>
-            <a:normAutofit fontScale="40000" lnSpcReduction="20000"/>
+            <a:normAutofit lnSpcReduction="10000"/>
           </a:bodyPr>
           <a:lstStyle/>
           <a:p>
             <a:r>
-              <a:rPr lang="en-US" altLang="zh-CN" dirty="0"/>
-              <a:t>Q3.  Assume that at time t=0,  A sends a packet to C.  At t=0.5 seconds, </a:t>
-            </a:r>
-            <a:r>
-              <a:rPr lang="en-US" altLang="zh-CN" dirty="0">
+              <a:rPr lang="en-US" altLang="zh-CN" sz="1100" dirty="0"/>
+              <a:t>Q3.  In detail. Assume that at time t=0,  A sends a packet to C.  At t=0.5 seconds, </a:t>
+            </a:r>
+            <a:r>
+              <a:rPr lang="en-US" altLang="zh-CN" sz="1100" dirty="0">
                 <a:solidFill>
                   <a:srgbClr val="C00000"/>
                 </a:solidFill>
@@ -5611,63 +5696,63 @@
               <a:t>the link between R4 and R5 goes down</a:t>
             </a:r>
             <a:r>
-              <a:rPr lang="en-US" altLang="zh-CN" dirty="0"/>
+              <a:rPr lang="en-US" altLang="zh-CN" sz="1100" dirty="0"/>
               <a:t>, and R4 and R5 instantaneously recognize and recompute their routes. </a:t>
             </a:r>
           </a:p>
           <a:p>
             <a:r>
-              <a:rPr lang="en-US" altLang="zh-CN" dirty="0"/>
+              <a:rPr lang="en-US" altLang="zh-CN" sz="1100" dirty="0"/>
               <a:t>ANS:  </a:t>
             </a:r>
             <a:r>
-              <a:rPr lang="pt-BR" altLang="zh-CN" dirty="0"/>
+              <a:rPr lang="pt-BR" altLang="zh-CN" sz="1100" dirty="0"/>
               <a:t>A → R1 → R2 → R3 → R2 →R6 → R5 → C</a:t>
             </a:r>
           </a:p>
           <a:p>
             <a:r>
-              <a:rPr lang="en-US" altLang="zh-CN" dirty="0"/>
+              <a:rPr lang="en-US" altLang="zh-CN" sz="1100" dirty="0"/>
               <a:t>Explanation: Here is the detailed timeline of events for Q4.5, which is driven by the "race" between the packet's physical propagation delay and the Link-State Advertisement (LSA) propagation delay. Both delays are strictly tied to the link costs.</a:t>
             </a:r>
           </a:p>
           <a:p>
             <a:r>
-              <a:rPr lang="en-US" altLang="zh-CN" dirty="0"/>
+              <a:rPr lang="en-US" altLang="zh-CN" sz="1100" dirty="0"/>
               <a:t>t = 0.0s. Host A sends the packet toward Host C. The packet arrives at R1, and R1 forwards it to R2. The propagation delay for the R1-R2 link is 1 second.</a:t>
             </a:r>
           </a:p>
           <a:p>
             <a:r>
-              <a:rPr lang="en-US" altLang="zh-CN" dirty="0"/>
+              <a:rPr lang="en-US" altLang="zh-CN" sz="1100" dirty="0"/>
               <a:t>t = 0.5s. While the packet is mid-flight between R1 and R2, the link between R4 and R5 suddenly fails. R4 and R5 immediately recognize the failure and generate LSAs detailing the broken link. These LSAs begin propagating across the network at a speed dictated by the link costs.</a:t>
             </a:r>
           </a:p>
           <a:p>
             <a:r>
-              <a:rPr lang="en-US" altLang="zh-CN" dirty="0"/>
+              <a:rPr lang="en-US" altLang="zh-CN" sz="1100" dirty="0"/>
               <a:t>t = 1.0s. Packet Location: Arrives at R2. LSA Status: The failure LSA from R4 has not yet reached R2 because it has only been propagating for 0.5 seconds, and the delay (cost) from R4 to R2 is longer than that. Action: Because R2 is unaware of the broken link, its routing table still indicates that the shortest path to C is via R3. R2 forwards the packet to R3. The delay for the R2-R3 link is 2 seconds.</a:t>
             </a:r>
           </a:p>
           <a:p>
             <a:r>
-              <a:rPr lang="en-US" altLang="zh-CN" dirty="0"/>
+              <a:rPr lang="en-US" altLang="zh-CN" sz="1100" dirty="0"/>
               <a:t>t = 1.0s – 3.0s. Packet is in transit between R2 and R3. Meanwhile, the LSAs are continuing to propagate across the network toward R2 and R3.</a:t>
             </a:r>
           </a:p>
           <a:p>
             <a:r>
-              <a:rPr lang="en-US" altLang="zh-CN" dirty="0"/>
+              <a:rPr lang="en-US" altLang="zh-CN" sz="1100" dirty="0"/>
               <a:t>t = 3.0s. Packet Location: Arrives at R3. LSA Status: By this time (2.5 seconds after the failure), the LSA originating from R4 has successfully arrived at R3. R3 processes it instantaneously and updates its routing table. Action: R3 recalculates its shortest path to C because it now knows the R4-R5 link is down. The new shortest path routes back through R2. R3 forwards the packet back to R2, which takes another 2 seconds.</a:t>
             </a:r>
           </a:p>
           <a:p>
             <a:r>
-              <a:rPr lang="en-US" altLang="zh-CN" dirty="0"/>
+              <a:rPr lang="en-US" altLang="zh-CN" sz="1100" dirty="0"/>
               <a:t>t = 3.0s – 5.0s. Packet travels from R3 back to R2.  During this window, </a:t>
             </a:r>
             <a:r>
-              <a:rPr lang="en-US" altLang="zh-CN" dirty="0">
+              <a:rPr lang="en-US" altLang="zh-CN" sz="1100" dirty="0">
                 <a:solidFill>
                   <a:srgbClr val="C00000"/>
                 </a:solidFill>
@@ -5675,22 +5760,22 @@
               <a:t>the LSA from R4 also successfully reaches R2 at time 4.5</a:t>
             </a:r>
             <a:r>
-              <a:rPr lang="en-US" altLang="zh-CN" dirty="0"/>
+              <a:rPr lang="en-US" altLang="zh-CN" sz="1100" dirty="0"/>
               <a:t>, and R2 instantaneously updates its own routing table.</a:t>
             </a:r>
           </a:p>
           <a:p>
             <a:r>
-              <a:rPr lang="en-US" altLang="zh-CN" dirty="0"/>
+              <a:rPr lang="en-US" altLang="zh-CN" sz="1100" dirty="0"/>
               <a:t>t = 5.0s. Packet Location: Arrives back at R2. LSA Status: R2 is now fully aware of the R4-R5 link failure. Action: R2 recalculates its next-best path to C. With the old route invalidated, R2 determines the new optimal route is via R6. R2 forwards the packet to R6.</a:t>
             </a:r>
           </a:p>
           <a:p>
             <a:r>
-              <a:rPr lang="en-US" altLang="zh-CN" dirty="0"/>
+              <a:rPr lang="en-US" altLang="zh-CN" sz="1100" dirty="0"/>
               <a:t>t &gt; 5.0s. The packet successfully continues along the updated path, safely traveling from R6 → R5 → Host C.</a:t>
             </a:r>
-            <a:endParaRPr lang="zh-CN" altLang="en-US" dirty="0"/>
+            <a:endParaRPr lang="zh-CN" altLang="en-US" sz="1100" dirty="0"/>
           </a:p>
         </p:txBody>
       </p:sp>
@@ -5715,8 +5800,8 @@
         </p:blipFill>
         <p:spPr>
           <a:xfrm>
-            <a:off x="6248400" y="1752600"/>
-            <a:ext cx="5864832" cy="3068519"/>
+            <a:off x="6870180" y="1752601"/>
+            <a:ext cx="5243051" cy="2743199"/>
           </a:xfrm>
           <a:prstGeom prst="rect">
             <a:avLst/>
@@ -6071,12 +6156,12 @@
         <p:spPr>
           <a:xfrm>
             <a:off x="609600" y="1219200"/>
-            <a:ext cx="10972800" cy="5137150"/>
+            <a:ext cx="8686800" cy="5137150"/>
           </a:xfrm>
         </p:spPr>
         <p:txBody>
           <a:bodyPr>
-            <a:normAutofit fontScale="77500" lnSpcReduction="20000"/>
+            <a:normAutofit fontScale="70000" lnSpcReduction="20000"/>
           </a:bodyPr>
           <a:lstStyle/>
           <a:p>
@@ -6155,6 +6240,313 @@
           </a:p>
         </p:txBody>
       </p:sp>
+      <p:graphicFrame>
+        <p:nvGraphicFramePr>
+          <p:cNvPr id="6" name="Table 5">
+            <a:extLst>
+              <a:ext uri="{FF2B5EF4-FFF2-40B4-BE49-F238E27FC236}">
+                <a16:creationId xmlns:a16="http://schemas.microsoft.com/office/drawing/2014/main" id="{4E424810-DD32-37FE-43F5-DB491C93CF8A}"/>
+              </a:ext>
+            </a:extLst>
+          </p:cNvPr>
+          <p:cNvGraphicFramePr>
+            <a:graphicFrameLocks noGrp="1"/>
+          </p:cNvGraphicFramePr>
+          <p:nvPr>
+            <p:extLst>
+              <p:ext uri="{D42A27DB-BD31-4B8C-83A1-F6EECF244321}">
+                <p14:modId xmlns:p14="http://schemas.microsoft.com/office/powerpoint/2010/main" val="3617915001"/>
+              </p:ext>
+            </p:extLst>
+          </p:nvPr>
+        </p:nvGraphicFramePr>
+        <p:xfrm>
+          <a:off x="9525000" y="2438400"/>
+          <a:ext cx="2489468" cy="2362232"/>
+        </p:xfrm>
+        <a:graphic>
+          <a:graphicData uri="http://schemas.openxmlformats.org/drawingml/2006/table">
+            <a:tbl>
+              <a:tblPr firstRow="1" bandRow="1"/>
+              <a:tblGrid>
+                <a:gridCol w="1025075">
+                  <a:extLst>
+                    <a:ext uri="{9D8B030D-6E8A-4147-A177-3AD203B41FA5}">
+                      <a16:colId xmlns:a16="http://schemas.microsoft.com/office/drawing/2014/main" val="4288895764"/>
+                    </a:ext>
+                  </a:extLst>
+                </a:gridCol>
+                <a:gridCol w="1464393">
+                  <a:extLst>
+                    <a:ext uri="{9D8B030D-6E8A-4147-A177-3AD203B41FA5}">
+                      <a16:colId xmlns:a16="http://schemas.microsoft.com/office/drawing/2014/main" val="979843445"/>
+                    </a:ext>
+                  </a:extLst>
+                </a:gridCol>
+              </a:tblGrid>
+              <a:tr h="350552">
+                <a:tc>
+                  <a:txBody>
+                    <a:bodyPr/>
+                    <a:lstStyle/>
+                    <a:p>
+                      <a:pPr algn="ctr"/>
+                      <a:r>
+                        <a:rPr lang="en-US" altLang="zh-CN" sz="1600" b="1" dirty="0"/>
+                        <a:t>Decimal</a:t>
+                      </a:r>
+                      <a:endParaRPr lang="zh-CN" altLang="en-US" sz="1600" b="1" dirty="0"/>
+                    </a:p>
+                  </a:txBody>
+                  <a:tcPr/>
+                </a:tc>
+                <a:tc>
+                  <a:txBody>
+                    <a:bodyPr/>
+                    <a:lstStyle/>
+                    <a:p>
+                      <a:pPr algn="ctr"/>
+                      <a:r>
+                        <a:rPr lang="en-US" altLang="zh-CN" sz="1600" b="1" dirty="0"/>
+                        <a:t>Binary</a:t>
+                      </a:r>
+                      <a:endParaRPr lang="zh-CN" altLang="en-US" sz="1600" b="1" dirty="0"/>
+                    </a:p>
+                  </a:txBody>
+                  <a:tcPr/>
+                </a:tc>
+                <a:extLst>
+                  <a:ext uri="{0D108BD9-81ED-4DB2-BD59-A6C34878D82A}">
+                    <a16:rowId xmlns:a16="http://schemas.microsoft.com/office/drawing/2014/main" val="3613287987"/>
+                  </a:ext>
+                </a:extLst>
+              </a:tr>
+              <a:tr h="309073">
+                <a:tc>
+                  <a:txBody>
+                    <a:bodyPr/>
+                    <a:lstStyle/>
+                    <a:p>
+                      <a:pPr algn="ctr"/>
+                      <a:r>
+                        <a:rPr lang="en-US" altLang="zh-CN" sz="1600" dirty="0"/>
+                        <a:t>198</a:t>
+                      </a:r>
+                      <a:endParaRPr lang="zh-CN" altLang="en-US" sz="1600" dirty="0"/>
+                    </a:p>
+                  </a:txBody>
+                  <a:tcPr/>
+                </a:tc>
+                <a:tc>
+                  <a:txBody>
+                    <a:bodyPr/>
+                    <a:lstStyle/>
+                    <a:p>
+                      <a:pPr algn="ctr"/>
+                      <a:r>
+                        <a:rPr lang="en-US" altLang="zh-CN" sz="1600" dirty="0"/>
+                        <a:t>11000110</a:t>
+                      </a:r>
+                      <a:endParaRPr lang="zh-CN" altLang="en-US" sz="1600" dirty="0"/>
+                    </a:p>
+                  </a:txBody>
+                  <a:tcPr/>
+                </a:tc>
+                <a:extLst>
+                  <a:ext uri="{0D108BD9-81ED-4DB2-BD59-A6C34878D82A}">
+                    <a16:rowId xmlns:a16="http://schemas.microsoft.com/office/drawing/2014/main" val="1442225972"/>
+                  </a:ext>
+                </a:extLst>
+              </a:tr>
+              <a:tr h="309073">
+                <a:tc>
+                  <a:txBody>
+                    <a:bodyPr/>
+                    <a:lstStyle/>
+                    <a:p>
+                      <a:pPr algn="ctr"/>
+                      <a:r>
+                        <a:rPr lang="en-US" altLang="zh-CN" sz="1600" dirty="0"/>
+                        <a:t>51</a:t>
+                      </a:r>
+                      <a:endParaRPr lang="zh-CN" altLang="en-US" sz="1600" dirty="0"/>
+                    </a:p>
+                  </a:txBody>
+                  <a:tcPr/>
+                </a:tc>
+                <a:tc>
+                  <a:txBody>
+                    <a:bodyPr/>
+                    <a:lstStyle/>
+                    <a:p>
+                      <a:pPr algn="ctr"/>
+                      <a:r>
+                        <a:rPr lang="en-US" altLang="zh-CN" sz="1600" dirty="0"/>
+                        <a:t>00110011</a:t>
+                      </a:r>
+                      <a:endParaRPr lang="zh-CN" altLang="en-US" sz="1600" dirty="0"/>
+                    </a:p>
+                  </a:txBody>
+                  <a:tcPr/>
+                </a:tc>
+                <a:extLst>
+                  <a:ext uri="{0D108BD9-81ED-4DB2-BD59-A6C34878D82A}">
+                    <a16:rowId xmlns:a16="http://schemas.microsoft.com/office/drawing/2014/main" val="3986029047"/>
+                  </a:ext>
+                </a:extLst>
+              </a:tr>
+              <a:tr h="309073">
+                <a:tc>
+                  <a:txBody>
+                    <a:bodyPr/>
+                    <a:lstStyle/>
+                    <a:p>
+                      <a:pPr algn="ctr"/>
+                      <a:r>
+                        <a:rPr lang="en-US" altLang="zh-CN" sz="1600" dirty="0"/>
+                        <a:t>192</a:t>
+                      </a:r>
+                      <a:endParaRPr lang="zh-CN" altLang="en-US" sz="1600" dirty="0"/>
+                    </a:p>
+                  </a:txBody>
+                  <a:tcPr/>
+                </a:tc>
+                <a:tc>
+                  <a:txBody>
+                    <a:bodyPr/>
+                    <a:lstStyle/>
+                    <a:p>
+                      <a:pPr algn="ctr"/>
+                      <a:r>
+                        <a:rPr lang="en-US" altLang="zh-CN" sz="1600" dirty="0"/>
+                        <a:t>11000000</a:t>
+                      </a:r>
+                      <a:endParaRPr lang="zh-CN" altLang="en-US" sz="1600" dirty="0"/>
+                    </a:p>
+                  </a:txBody>
+                  <a:tcPr/>
+                </a:tc>
+                <a:extLst>
+                  <a:ext uri="{0D108BD9-81ED-4DB2-BD59-A6C34878D82A}">
+                    <a16:rowId xmlns:a16="http://schemas.microsoft.com/office/drawing/2014/main" val="1625049812"/>
+                  </a:ext>
+                </a:extLst>
+              </a:tr>
+              <a:tr h="309073">
+                <a:tc>
+                  <a:txBody>
+                    <a:bodyPr/>
+                    <a:lstStyle/>
+                    <a:p>
+                      <a:pPr algn="ctr"/>
+                      <a:r>
+                        <a:rPr lang="en-US" altLang="zh-CN" sz="1600" dirty="0"/>
+                        <a:t>224</a:t>
+                      </a:r>
+                      <a:endParaRPr lang="zh-CN" altLang="en-US" sz="1600" dirty="0"/>
+                    </a:p>
+                  </a:txBody>
+                  <a:tcPr/>
+                </a:tc>
+                <a:tc>
+                  <a:txBody>
+                    <a:bodyPr/>
+                    <a:lstStyle/>
+                    <a:p>
+                      <a:pPr algn="ctr"/>
+                      <a:r>
+                        <a:rPr lang="en-US" altLang="zh-CN" sz="1600" dirty="0"/>
+                        <a:t>11100000</a:t>
+                      </a:r>
+                      <a:endParaRPr lang="zh-CN" altLang="en-US" sz="1600" dirty="0"/>
+                    </a:p>
+                  </a:txBody>
+                  <a:tcPr/>
+                </a:tc>
+                <a:extLst>
+                  <a:ext uri="{0D108BD9-81ED-4DB2-BD59-A6C34878D82A}">
+                    <a16:rowId xmlns:a16="http://schemas.microsoft.com/office/drawing/2014/main" val="2547121994"/>
+                  </a:ext>
+                </a:extLst>
+              </a:tr>
+              <a:tr h="309073">
+                <a:tc>
+                  <a:txBody>
+                    <a:bodyPr/>
+                    <a:lstStyle/>
+                    <a:p>
+                      <a:pPr algn="ctr"/>
+                      <a:r>
+                        <a:rPr lang="en-US" altLang="zh-CN" sz="1600" dirty="0"/>
+                        <a:t>64</a:t>
+                      </a:r>
+                      <a:endParaRPr lang="zh-CN" altLang="en-US" sz="1600" dirty="0"/>
+                    </a:p>
+                  </a:txBody>
+                  <a:tcPr/>
+                </a:tc>
+                <a:tc>
+                  <a:txBody>
+                    <a:bodyPr/>
+                    <a:lstStyle/>
+                    <a:p>
+                      <a:pPr algn="ctr"/>
+                      <a:r>
+                        <a:rPr lang="en-US" altLang="zh-CN" sz="1600" dirty="0"/>
+                        <a:t>01000000</a:t>
+                      </a:r>
+                      <a:endParaRPr lang="zh-CN" altLang="en-US" sz="1600" dirty="0"/>
+                    </a:p>
+                  </a:txBody>
+                  <a:tcPr/>
+                </a:tc>
+                <a:extLst>
+                  <a:ext uri="{0D108BD9-81ED-4DB2-BD59-A6C34878D82A}">
+                    <a16:rowId xmlns:a16="http://schemas.microsoft.com/office/drawing/2014/main" val="2161253667"/>
+                  </a:ext>
+                </a:extLst>
+              </a:tr>
+              <a:tr h="309073">
+                <a:tc>
+                  <a:txBody>
+                    <a:bodyPr/>
+                    <a:lstStyle/>
+                    <a:p>
+                      <a:pPr algn="ctr"/>
+                      <a:r>
+                        <a:rPr lang="en-US" altLang="zh-CN" sz="1600" dirty="0"/>
+                        <a:t>128 </a:t>
+                      </a:r>
+                      <a:endParaRPr lang="zh-CN" altLang="en-US" sz="1600" dirty="0"/>
+                    </a:p>
+                  </a:txBody>
+                  <a:tcPr/>
+                </a:tc>
+                <a:tc>
+                  <a:txBody>
+                    <a:bodyPr/>
+                    <a:lstStyle/>
+                    <a:p>
+                      <a:pPr algn="ctr"/>
+                      <a:r>
+                        <a:rPr lang="en-US" altLang="zh-CN" sz="1600" dirty="0"/>
+                        <a:t>10000000 </a:t>
+                      </a:r>
+                      <a:endParaRPr lang="zh-CN" altLang="en-US" sz="1600" dirty="0"/>
+                    </a:p>
+                  </a:txBody>
+                  <a:tcPr/>
+                </a:tc>
+                <a:extLst>
+                  <a:ext uri="{0D108BD9-81ED-4DB2-BD59-A6C34878D82A}">
+                    <a16:rowId xmlns:a16="http://schemas.microsoft.com/office/drawing/2014/main" val="3343002594"/>
+                  </a:ext>
+                </a:extLst>
+              </a:tr>
+            </a:tbl>
+          </a:graphicData>
+        </a:graphic>
+      </p:graphicFrame>
     </p:spTree>
     <p:extLst>
       <p:ext uri="{BB962C8B-B14F-4D97-AF65-F5344CB8AC3E}">
@@ -6437,6 +6829,313 @@
           </a:p>
         </p:txBody>
       </p:sp>
+      <p:graphicFrame>
+        <p:nvGraphicFramePr>
+          <p:cNvPr id="6" name="Table 5">
+            <a:extLst>
+              <a:ext uri="{FF2B5EF4-FFF2-40B4-BE49-F238E27FC236}">
+                <a16:creationId xmlns:a16="http://schemas.microsoft.com/office/drawing/2014/main" id="{FCF22305-09C4-9351-A56F-F000E4123DD1}"/>
+              </a:ext>
+            </a:extLst>
+          </p:cNvPr>
+          <p:cNvGraphicFramePr>
+            <a:graphicFrameLocks noGrp="1"/>
+          </p:cNvGraphicFramePr>
+          <p:nvPr>
+            <p:extLst>
+              <p:ext uri="{D42A27DB-BD31-4B8C-83A1-F6EECF244321}">
+                <p14:modId xmlns:p14="http://schemas.microsoft.com/office/powerpoint/2010/main" val="3781936587"/>
+              </p:ext>
+            </p:extLst>
+          </p:nvPr>
+        </p:nvGraphicFramePr>
+        <p:xfrm>
+          <a:off x="8534400" y="2506964"/>
+          <a:ext cx="2489468" cy="2362232"/>
+        </p:xfrm>
+        <a:graphic>
+          <a:graphicData uri="http://schemas.openxmlformats.org/drawingml/2006/table">
+            <a:tbl>
+              <a:tblPr firstRow="1" bandRow="1"/>
+              <a:tblGrid>
+                <a:gridCol w="1025075">
+                  <a:extLst>
+                    <a:ext uri="{9D8B030D-6E8A-4147-A177-3AD203B41FA5}">
+                      <a16:colId xmlns:a16="http://schemas.microsoft.com/office/drawing/2014/main" val="4288895764"/>
+                    </a:ext>
+                  </a:extLst>
+                </a:gridCol>
+                <a:gridCol w="1464393">
+                  <a:extLst>
+                    <a:ext uri="{9D8B030D-6E8A-4147-A177-3AD203B41FA5}">
+                      <a16:colId xmlns:a16="http://schemas.microsoft.com/office/drawing/2014/main" val="979843445"/>
+                    </a:ext>
+                  </a:extLst>
+                </a:gridCol>
+              </a:tblGrid>
+              <a:tr h="350552">
+                <a:tc>
+                  <a:txBody>
+                    <a:bodyPr/>
+                    <a:lstStyle/>
+                    <a:p>
+                      <a:pPr algn="ctr"/>
+                      <a:r>
+                        <a:rPr lang="en-US" altLang="zh-CN" sz="1600" b="1" dirty="0"/>
+                        <a:t>Decimal</a:t>
+                      </a:r>
+                      <a:endParaRPr lang="zh-CN" altLang="en-US" sz="1600" b="1" dirty="0"/>
+                    </a:p>
+                  </a:txBody>
+                  <a:tcPr/>
+                </a:tc>
+                <a:tc>
+                  <a:txBody>
+                    <a:bodyPr/>
+                    <a:lstStyle/>
+                    <a:p>
+                      <a:pPr algn="ctr"/>
+                      <a:r>
+                        <a:rPr lang="en-US" altLang="zh-CN" sz="1600" b="1" dirty="0"/>
+                        <a:t>Binary</a:t>
+                      </a:r>
+                      <a:endParaRPr lang="zh-CN" altLang="en-US" sz="1600" b="1" dirty="0"/>
+                    </a:p>
+                  </a:txBody>
+                  <a:tcPr/>
+                </a:tc>
+                <a:extLst>
+                  <a:ext uri="{0D108BD9-81ED-4DB2-BD59-A6C34878D82A}">
+                    <a16:rowId xmlns:a16="http://schemas.microsoft.com/office/drawing/2014/main" val="3613287987"/>
+                  </a:ext>
+                </a:extLst>
+              </a:tr>
+              <a:tr h="309073">
+                <a:tc>
+                  <a:txBody>
+                    <a:bodyPr/>
+                    <a:lstStyle/>
+                    <a:p>
+                      <a:pPr algn="ctr"/>
+                      <a:r>
+                        <a:rPr lang="en-US" altLang="zh-CN" sz="1600" dirty="0"/>
+                        <a:t>198</a:t>
+                      </a:r>
+                      <a:endParaRPr lang="zh-CN" altLang="en-US" sz="1600" dirty="0"/>
+                    </a:p>
+                  </a:txBody>
+                  <a:tcPr/>
+                </a:tc>
+                <a:tc>
+                  <a:txBody>
+                    <a:bodyPr/>
+                    <a:lstStyle/>
+                    <a:p>
+                      <a:pPr algn="ctr"/>
+                      <a:r>
+                        <a:rPr lang="en-US" altLang="zh-CN" sz="1600" dirty="0"/>
+                        <a:t>11000110</a:t>
+                      </a:r>
+                      <a:endParaRPr lang="zh-CN" altLang="en-US" sz="1600" dirty="0"/>
+                    </a:p>
+                  </a:txBody>
+                  <a:tcPr/>
+                </a:tc>
+                <a:extLst>
+                  <a:ext uri="{0D108BD9-81ED-4DB2-BD59-A6C34878D82A}">
+                    <a16:rowId xmlns:a16="http://schemas.microsoft.com/office/drawing/2014/main" val="1442225972"/>
+                  </a:ext>
+                </a:extLst>
+              </a:tr>
+              <a:tr h="309073">
+                <a:tc>
+                  <a:txBody>
+                    <a:bodyPr/>
+                    <a:lstStyle/>
+                    <a:p>
+                      <a:pPr algn="ctr"/>
+                      <a:r>
+                        <a:rPr lang="en-US" altLang="zh-CN" sz="1600" dirty="0"/>
+                        <a:t>51</a:t>
+                      </a:r>
+                      <a:endParaRPr lang="zh-CN" altLang="en-US" sz="1600" dirty="0"/>
+                    </a:p>
+                  </a:txBody>
+                  <a:tcPr/>
+                </a:tc>
+                <a:tc>
+                  <a:txBody>
+                    <a:bodyPr/>
+                    <a:lstStyle/>
+                    <a:p>
+                      <a:pPr algn="ctr"/>
+                      <a:r>
+                        <a:rPr lang="en-US" altLang="zh-CN" sz="1600" dirty="0"/>
+                        <a:t>00110011</a:t>
+                      </a:r>
+                      <a:endParaRPr lang="zh-CN" altLang="en-US" sz="1600" dirty="0"/>
+                    </a:p>
+                  </a:txBody>
+                  <a:tcPr/>
+                </a:tc>
+                <a:extLst>
+                  <a:ext uri="{0D108BD9-81ED-4DB2-BD59-A6C34878D82A}">
+                    <a16:rowId xmlns:a16="http://schemas.microsoft.com/office/drawing/2014/main" val="3986029047"/>
+                  </a:ext>
+                </a:extLst>
+              </a:tr>
+              <a:tr h="309073">
+                <a:tc>
+                  <a:txBody>
+                    <a:bodyPr/>
+                    <a:lstStyle/>
+                    <a:p>
+                      <a:pPr algn="ctr"/>
+                      <a:r>
+                        <a:rPr lang="en-US" altLang="zh-CN" sz="1600" dirty="0"/>
+                        <a:t>192</a:t>
+                      </a:r>
+                      <a:endParaRPr lang="zh-CN" altLang="en-US" sz="1600" dirty="0"/>
+                    </a:p>
+                  </a:txBody>
+                  <a:tcPr/>
+                </a:tc>
+                <a:tc>
+                  <a:txBody>
+                    <a:bodyPr/>
+                    <a:lstStyle/>
+                    <a:p>
+                      <a:pPr algn="ctr"/>
+                      <a:r>
+                        <a:rPr lang="en-US" altLang="zh-CN" sz="1600" dirty="0"/>
+                        <a:t>11000000</a:t>
+                      </a:r>
+                      <a:endParaRPr lang="zh-CN" altLang="en-US" sz="1600" dirty="0"/>
+                    </a:p>
+                  </a:txBody>
+                  <a:tcPr/>
+                </a:tc>
+                <a:extLst>
+                  <a:ext uri="{0D108BD9-81ED-4DB2-BD59-A6C34878D82A}">
+                    <a16:rowId xmlns:a16="http://schemas.microsoft.com/office/drawing/2014/main" val="1625049812"/>
+                  </a:ext>
+                </a:extLst>
+              </a:tr>
+              <a:tr h="309073">
+                <a:tc>
+                  <a:txBody>
+                    <a:bodyPr/>
+                    <a:lstStyle/>
+                    <a:p>
+                      <a:pPr algn="ctr"/>
+                      <a:r>
+                        <a:rPr lang="en-US" altLang="zh-CN" sz="1600" dirty="0"/>
+                        <a:t>224</a:t>
+                      </a:r>
+                      <a:endParaRPr lang="zh-CN" altLang="en-US" sz="1600" dirty="0"/>
+                    </a:p>
+                  </a:txBody>
+                  <a:tcPr/>
+                </a:tc>
+                <a:tc>
+                  <a:txBody>
+                    <a:bodyPr/>
+                    <a:lstStyle/>
+                    <a:p>
+                      <a:pPr algn="ctr"/>
+                      <a:r>
+                        <a:rPr lang="en-US" altLang="zh-CN" sz="1600" dirty="0"/>
+                        <a:t>11100000</a:t>
+                      </a:r>
+                      <a:endParaRPr lang="zh-CN" altLang="en-US" sz="1600" dirty="0"/>
+                    </a:p>
+                  </a:txBody>
+                  <a:tcPr/>
+                </a:tc>
+                <a:extLst>
+                  <a:ext uri="{0D108BD9-81ED-4DB2-BD59-A6C34878D82A}">
+                    <a16:rowId xmlns:a16="http://schemas.microsoft.com/office/drawing/2014/main" val="2547121994"/>
+                  </a:ext>
+                </a:extLst>
+              </a:tr>
+              <a:tr h="309073">
+                <a:tc>
+                  <a:txBody>
+                    <a:bodyPr/>
+                    <a:lstStyle/>
+                    <a:p>
+                      <a:pPr algn="ctr"/>
+                      <a:r>
+                        <a:rPr lang="en-US" altLang="zh-CN" sz="1600" dirty="0"/>
+                        <a:t>64</a:t>
+                      </a:r>
+                      <a:endParaRPr lang="zh-CN" altLang="en-US" sz="1600" dirty="0"/>
+                    </a:p>
+                  </a:txBody>
+                  <a:tcPr/>
+                </a:tc>
+                <a:tc>
+                  <a:txBody>
+                    <a:bodyPr/>
+                    <a:lstStyle/>
+                    <a:p>
+                      <a:pPr algn="ctr"/>
+                      <a:r>
+                        <a:rPr lang="en-US" altLang="zh-CN" sz="1600" dirty="0"/>
+                        <a:t>01000000</a:t>
+                      </a:r>
+                      <a:endParaRPr lang="zh-CN" altLang="en-US" sz="1600" dirty="0"/>
+                    </a:p>
+                  </a:txBody>
+                  <a:tcPr/>
+                </a:tc>
+                <a:extLst>
+                  <a:ext uri="{0D108BD9-81ED-4DB2-BD59-A6C34878D82A}">
+                    <a16:rowId xmlns:a16="http://schemas.microsoft.com/office/drawing/2014/main" val="2161253667"/>
+                  </a:ext>
+                </a:extLst>
+              </a:tr>
+              <a:tr h="309073">
+                <a:tc>
+                  <a:txBody>
+                    <a:bodyPr/>
+                    <a:lstStyle/>
+                    <a:p>
+                      <a:pPr algn="ctr"/>
+                      <a:r>
+                        <a:rPr lang="en-US" altLang="zh-CN" sz="1600" dirty="0"/>
+                        <a:t>128 </a:t>
+                      </a:r>
+                      <a:endParaRPr lang="zh-CN" altLang="en-US" sz="1600" dirty="0"/>
+                    </a:p>
+                  </a:txBody>
+                  <a:tcPr/>
+                </a:tc>
+                <a:tc>
+                  <a:txBody>
+                    <a:bodyPr/>
+                    <a:lstStyle/>
+                    <a:p>
+                      <a:pPr algn="ctr"/>
+                      <a:r>
+                        <a:rPr lang="en-US" altLang="zh-CN" sz="1600" dirty="0"/>
+                        <a:t>10000000 </a:t>
+                      </a:r>
+                      <a:endParaRPr lang="zh-CN" altLang="en-US" sz="1600" dirty="0"/>
+                    </a:p>
+                  </a:txBody>
+                  <a:tcPr/>
+                </a:tc>
+                <a:extLst>
+                  <a:ext uri="{0D108BD9-81ED-4DB2-BD59-A6C34878D82A}">
+                    <a16:rowId xmlns:a16="http://schemas.microsoft.com/office/drawing/2014/main" val="3343002594"/>
+                  </a:ext>
+                </a:extLst>
+              </a:tr>
+            </a:tbl>
+          </a:graphicData>
+        </a:graphic>
+      </p:graphicFrame>
     </p:spTree>
     <p:extLst>
       <p:ext uri="{BB962C8B-B14F-4D97-AF65-F5344CB8AC3E}">
@@ -7629,7 +8328,7 @@
           <p:nvPr/>
         </p:nvPicPr>
         <p:blipFill>
-          <a:blip r:embed="rId2">
+          <a:blip r:embed="rId3">
             <a:extLst>
               <a:ext uri="{28A0092B-C50C-407E-A947-70E740481C1C}">
                 <a14:useLocalDpi xmlns:a14="http://schemas.microsoft.com/office/drawing/2010/main" val="0"/>
@@ -7664,7 +8363,7 @@
           <p:nvPr/>
         </p:nvPicPr>
         <p:blipFill>
-          <a:blip r:embed="rId3"/>
+          <a:blip r:embed="rId4"/>
           <a:stretch>
             <a:fillRect/>
           </a:stretch>
@@ -8322,8 +9021,8 @@
           </a:p>
         </p:txBody>
       </p:sp>
-      <mc:AlternateContent xmlns:mc="http://schemas.openxmlformats.org/markup-compatibility/2006">
-        <mc:Choice xmlns:a14="http://schemas.microsoft.com/office/drawing/2010/main" Requires="a14">
+      <mc:AlternateContent xmlns:mc="http://schemas.openxmlformats.org/markup-compatibility/2006" xmlns:a14="http://schemas.microsoft.com/office/drawing/2010/main">
+        <mc:Choice Requires="a14">
           <p:sp>
             <p:nvSpPr>
               <p:cNvPr id="4" name="Content Placeholder 3">
@@ -8417,7 +9116,9 @@
                     <m:sSup>
                       <m:sSupPr>
                         <m:ctrlPr>
-                          <a:rPr lang="ar-AE" altLang="zh-CN" i="1"/>
+                          <a:rPr lang="ar-AE" altLang="zh-CN" i="1">
+                            <a:latin typeface="Cambria Math" panose="02040503050406030204" pitchFamily="18" charset="0"/>
+                          </a:rPr>
                         </m:ctrlPr>
                       </m:sSupPr>
                       <m:e>
@@ -8471,7 +9172,9 @@
                     <m:sSub>
                       <m:sSubPr>
                         <m:ctrlPr>
-                          <a:rPr lang="ar-AE" altLang="zh-CN"/>
+                          <a:rPr lang="ar-AE" altLang="zh-CN" i="1">
+                            <a:latin typeface="Cambria Math" panose="02040503050406030204" pitchFamily="18" charset="0"/>
+                          </a:rPr>
                         </m:ctrlPr>
                       </m:sSubPr>
                       <m:e>
@@ -8508,7 +9211,9 @@
                     <m:sSub>
                       <m:sSubPr>
                         <m:ctrlPr>
-                          <a:rPr lang="ar-AE" altLang="zh-CN"/>
+                          <a:rPr lang="ar-AE" altLang="zh-CN" i="1">
+                            <a:latin typeface="Cambria Math" panose="02040503050406030204" pitchFamily="18" charset="0"/>
+                          </a:rPr>
                         </m:ctrlPr>
                       </m:sSubPr>
                       <m:e>
@@ -8548,7 +9253,7 @@
             </p:txBody>
           </p:sp>
         </mc:Choice>
-        <mc:Fallback>
+        <mc:Fallback xmlns="">
           <p:sp>
             <p:nvSpPr>
               <p:cNvPr id="4" name="Content Placeholder 3">
@@ -16419,8 +17124,8 @@
           </a:p>
         </p:txBody>
       </p:sp>
-      <mc:AlternateContent xmlns:mc="http://schemas.openxmlformats.org/markup-compatibility/2006">
-        <mc:Choice xmlns:a14="http://schemas.microsoft.com/office/drawing/2010/main" Requires="a14">
+      <mc:AlternateContent xmlns:mc="http://schemas.openxmlformats.org/markup-compatibility/2006" xmlns:a14="http://schemas.microsoft.com/office/drawing/2010/main">
+        <mc:Choice Requires="a14">
           <p:sp>
             <p:nvSpPr>
               <p:cNvPr id="4" name="Content Placeholder 3">
@@ -16465,41 +17170,55 @@
                     <m:sSub>
                       <m:sSubPr>
                         <m:ctrlPr>
-                          <a:rPr lang="zh-CN" altLang="zh-CN" i="1"/>
+                          <a:rPr lang="zh-CN" altLang="zh-CN" i="1">
+                            <a:latin typeface="Cambria Math" panose="02040503050406030204" pitchFamily="18" charset="0"/>
+                          </a:rPr>
                         </m:ctrlPr>
                       </m:sSubPr>
                       <m:e>
                         <m:r>
-                          <a:rPr lang="en-US" altLang="zh-CN" i="1"/>
+                          <a:rPr lang="en-US" altLang="zh-CN" i="1">
+                            <a:latin typeface="Cambria Math" panose="02040503050406030204" pitchFamily="18" charset="0"/>
+                          </a:rPr>
                           <m:t>𝑑</m:t>
                         </m:r>
                       </m:e>
                       <m:sub>
                         <m:r>
-                          <a:rPr lang="en-US" altLang="zh-CN" i="1"/>
+                          <a:rPr lang="en-US" altLang="zh-CN" i="1">
+                            <a:latin typeface="Cambria Math" panose="02040503050406030204" pitchFamily="18" charset="0"/>
+                          </a:rPr>
                           <m:t>𝑡𝑟𝑎𝑛𝑠</m:t>
                         </m:r>
                       </m:sub>
                     </m:sSub>
                     <m:r>
-                      <a:rPr lang="en-US" altLang="zh-CN"/>
+                      <a:rPr lang="en-US" altLang="zh-CN">
+                        <a:latin typeface="Cambria Math" panose="02040503050406030204" pitchFamily="18" charset="0"/>
+                      </a:rPr>
                       <m:t>=</m:t>
                     </m:r>
                     <m:f>
                       <m:fPr>
                         <m:ctrlPr>
-                          <a:rPr lang="zh-CN" altLang="zh-CN" i="1"/>
+                          <a:rPr lang="zh-CN" altLang="zh-CN" i="1">
+                            <a:latin typeface="Cambria Math" panose="02040503050406030204" pitchFamily="18" charset="0"/>
+                          </a:rPr>
                         </m:ctrlPr>
                       </m:fPr>
                       <m:num>
                         <m:r>
-                          <a:rPr lang="en-US" altLang="zh-CN" i="1"/>
+                          <a:rPr lang="en-US" altLang="zh-CN" i="1">
+                            <a:latin typeface="Cambria Math" panose="02040503050406030204" pitchFamily="18" charset="0"/>
+                          </a:rPr>
                           <m:t>𝐿</m:t>
                         </m:r>
                       </m:num>
                       <m:den>
                         <m:r>
-                          <a:rPr lang="en-US" altLang="zh-CN" i="1"/>
+                          <a:rPr lang="en-US" altLang="zh-CN" i="1">
+                            <a:latin typeface="Cambria Math" panose="02040503050406030204" pitchFamily="18" charset="0"/>
+                          </a:rPr>
                           <m:t>𝑅</m:t>
                         </m:r>
                       </m:den>
@@ -16517,11 +17236,15 @@
                 <a14:m>
                   <m:oMath xmlns:m="http://schemas.openxmlformats.org/officeDocument/2006/math">
                     <m:r>
-                      <a:rPr lang="en-US" altLang="zh-CN" i="1"/>
+                      <a:rPr lang="en-US" altLang="zh-CN" i="1">
+                        <a:latin typeface="Cambria Math" panose="02040503050406030204" pitchFamily="18" charset="0"/>
+                      </a:rPr>
                       <m:t>𝐿</m:t>
                     </m:r>
                     <m:r>
-                      <a:rPr lang="en-US" altLang="zh-CN"/>
+                      <a:rPr lang="en-US" altLang="zh-CN">
+                        <a:latin typeface="Cambria Math" panose="02040503050406030204" pitchFamily="18" charset="0"/>
+                      </a:rPr>
                       <m:t>=1,500</m:t>
                     </m:r>
                     <m:r>
@@ -16539,7 +17262,9 @@
                       <m:t>bytes</m:t>
                     </m:r>
                     <m:r>
-                      <a:rPr lang="en-US" altLang="zh-CN"/>
+                      <a:rPr lang="en-US" altLang="zh-CN">
+                        <a:latin typeface="Cambria Math" panose="02040503050406030204" pitchFamily="18" charset="0"/>
+                      </a:rPr>
                       <m:t>×8</m:t>
                     </m:r>
                     <m:r>
@@ -16571,7 +17296,9 @@
                       <m:t>byte</m:t>
                     </m:r>
                     <m:r>
-                      <a:rPr lang="en-US" altLang="zh-CN"/>
+                      <a:rPr lang="en-US" altLang="zh-CN">
+                        <a:latin typeface="Cambria Math" panose="02040503050406030204" pitchFamily="18" charset="0"/>
+                      </a:rPr>
                       <m:t>=12,000</m:t>
                     </m:r>
                     <m:r>
@@ -16601,11 +17328,15 @@
                 <a14:m>
                   <m:oMath xmlns:m="http://schemas.openxmlformats.org/officeDocument/2006/math">
                     <m:r>
-                      <a:rPr lang="en-US" altLang="zh-CN" i="1"/>
+                      <a:rPr lang="en-US" altLang="zh-CN" i="1">
+                        <a:latin typeface="Cambria Math" panose="02040503050406030204" pitchFamily="18" charset="0"/>
+                      </a:rPr>
                       <m:t>𝑅</m:t>
                     </m:r>
                     <m:r>
-                      <a:rPr lang="en-US" altLang="zh-CN"/>
+                      <a:rPr lang="en-US" altLang="zh-CN">
+                        <a:latin typeface="Cambria Math" panose="02040503050406030204" pitchFamily="18" charset="0"/>
+                      </a:rPr>
                       <m:t>=10</m:t>
                     </m:r>
                     <m:r>
@@ -16623,7 +17354,9 @@
                       <m:t>Mbps</m:t>
                     </m:r>
                     <m:r>
-                      <a:rPr lang="en-US" altLang="zh-CN"/>
+                      <a:rPr lang="en-US" altLang="zh-CN">
+                        <a:latin typeface="Cambria Math" panose="02040503050406030204" pitchFamily="18" charset="0"/>
+                      </a:rPr>
                       <m:t>=10,000,000</m:t>
                     </m:r>
                     <m:r>
@@ -16651,47 +17384,63 @@
                     <m:sSub>
                       <m:sSubPr>
                         <m:ctrlPr>
-                          <a:rPr lang="zh-CN" altLang="zh-CN" i="1"/>
+                          <a:rPr lang="zh-CN" altLang="zh-CN" i="1">
+                            <a:latin typeface="Cambria Math" panose="02040503050406030204" pitchFamily="18" charset="0"/>
+                          </a:rPr>
                         </m:ctrlPr>
                       </m:sSubPr>
                       <m:e>
                         <m:r>
-                          <a:rPr lang="en-US" altLang="zh-CN" i="1"/>
+                          <a:rPr lang="en-US" altLang="zh-CN" i="1">
+                            <a:latin typeface="Cambria Math" panose="02040503050406030204" pitchFamily="18" charset="0"/>
+                          </a:rPr>
                           <m:t>𝑑</m:t>
                         </m:r>
                       </m:e>
                       <m:sub>
                         <m:r>
-                          <a:rPr lang="en-US" altLang="zh-CN" i="1"/>
+                          <a:rPr lang="en-US" altLang="zh-CN" i="1">
+                            <a:latin typeface="Cambria Math" panose="02040503050406030204" pitchFamily="18" charset="0"/>
+                          </a:rPr>
                           <m:t>𝑡𝑟𝑎𝑛𝑠</m:t>
                         </m:r>
                       </m:sub>
                     </m:sSub>
                     <m:r>
-                      <a:rPr lang="en-US" altLang="zh-CN"/>
+                      <a:rPr lang="en-US" altLang="zh-CN">
+                        <a:latin typeface="Cambria Math" panose="02040503050406030204" pitchFamily="18" charset="0"/>
+                      </a:rPr>
                       <m:t>=</m:t>
                     </m:r>
                     <m:f>
                       <m:fPr>
                         <m:ctrlPr>
-                          <a:rPr lang="zh-CN" altLang="zh-CN" i="1"/>
+                          <a:rPr lang="zh-CN" altLang="zh-CN" i="1">
+                            <a:latin typeface="Cambria Math" panose="02040503050406030204" pitchFamily="18" charset="0"/>
+                          </a:rPr>
                         </m:ctrlPr>
                       </m:fPr>
                       <m:num>
                         <m:r>
-                          <a:rPr lang="en-US" altLang="zh-CN"/>
+                          <a:rPr lang="en-US" altLang="zh-CN">
+                            <a:latin typeface="Cambria Math" panose="02040503050406030204" pitchFamily="18" charset="0"/>
+                          </a:rPr>
                           <m:t>12,000</m:t>
                         </m:r>
                       </m:num>
                       <m:den>
                         <m:r>
-                          <a:rPr lang="en-US" altLang="zh-CN"/>
+                          <a:rPr lang="en-US" altLang="zh-CN">
+                            <a:latin typeface="Cambria Math" panose="02040503050406030204" pitchFamily="18" charset="0"/>
+                          </a:rPr>
                           <m:t>10,000,000</m:t>
                         </m:r>
                       </m:den>
                     </m:f>
                     <m:r>
-                      <a:rPr lang="en-US" altLang="zh-CN"/>
+                      <a:rPr lang="en-US" altLang="zh-CN">
+                        <a:latin typeface="Cambria Math" panose="02040503050406030204" pitchFamily="18" charset="0"/>
+                      </a:rPr>
                       <m:t>=0.0012</m:t>
                     </m:r>
                     <m:r>
@@ -16709,27 +17458,39 @@
                       <m:t>seconds</m:t>
                     </m:r>
                     <m:r>
-                      <a:rPr lang="en-US" altLang="zh-CN"/>
+                      <a:rPr lang="en-US" altLang="zh-CN">
+                        <a:latin typeface="Cambria Math" panose="02040503050406030204" pitchFamily="18" charset="0"/>
+                      </a:rPr>
                       <m:t>=</m:t>
                     </m:r>
                     <m:r>
-                      <a:rPr lang="en-US" altLang="zh-CN" b="1"/>
+                      <a:rPr lang="en-US" altLang="zh-CN" b="1">
+                        <a:latin typeface="Cambria Math" panose="02040503050406030204" pitchFamily="18" charset="0"/>
+                      </a:rPr>
                       <m:t>𝟏</m:t>
                     </m:r>
                     <m:r>
-                      <a:rPr lang="en-US" altLang="zh-CN" b="1"/>
+                      <a:rPr lang="en-US" altLang="zh-CN" b="1">
+                        <a:latin typeface="Cambria Math" panose="02040503050406030204" pitchFamily="18" charset="0"/>
+                      </a:rPr>
                       <m:t>.</m:t>
                     </m:r>
                     <m:r>
-                      <a:rPr lang="en-US" altLang="zh-CN" b="1"/>
+                      <a:rPr lang="en-US" altLang="zh-CN" b="1">
+                        <a:latin typeface="Cambria Math" panose="02040503050406030204" pitchFamily="18" charset="0"/>
+                      </a:rPr>
                       <m:t>𝟐</m:t>
                     </m:r>
                     <m:r>
-                      <a:rPr lang="en-US" altLang="zh-CN" b="1"/>
+                      <a:rPr lang="en-US" altLang="zh-CN" b="1">
+                        <a:latin typeface="Cambria Math" panose="02040503050406030204" pitchFamily="18" charset="0"/>
+                      </a:rPr>
                       <m:t> </m:t>
                     </m:r>
                     <m:r>
-                      <a:rPr lang="en-US" altLang="zh-CN" b="1"/>
+                      <a:rPr lang="en-US" altLang="zh-CN" b="1">
+                        <a:latin typeface="Cambria Math" panose="02040503050406030204" pitchFamily="18" charset="0"/>
+                      </a:rPr>
                       <m:t>𝐦𝐬</m:t>
                     </m:r>
                   </m:oMath>
@@ -16758,41 +17519,55 @@
                     <m:sSub>
                       <m:sSubPr>
                         <m:ctrlPr>
-                          <a:rPr lang="zh-CN" altLang="zh-CN" i="1"/>
+                          <a:rPr lang="zh-CN" altLang="zh-CN" i="1">
+                            <a:latin typeface="Cambria Math" panose="02040503050406030204" pitchFamily="18" charset="0"/>
+                          </a:rPr>
                         </m:ctrlPr>
                       </m:sSubPr>
                       <m:e>
                         <m:r>
-                          <a:rPr lang="en-US" altLang="zh-CN" i="1"/>
+                          <a:rPr lang="en-US" altLang="zh-CN" i="1">
+                            <a:latin typeface="Cambria Math" panose="02040503050406030204" pitchFamily="18" charset="0"/>
+                          </a:rPr>
                           <m:t>𝑑</m:t>
                         </m:r>
                       </m:e>
                       <m:sub>
                         <m:r>
-                          <a:rPr lang="en-US" altLang="zh-CN" i="1"/>
+                          <a:rPr lang="en-US" altLang="zh-CN" i="1">
+                            <a:latin typeface="Cambria Math" panose="02040503050406030204" pitchFamily="18" charset="0"/>
+                          </a:rPr>
                           <m:t>𝑝𝑟𝑜𝑝</m:t>
                         </m:r>
                       </m:sub>
                     </m:sSub>
                     <m:r>
-                      <a:rPr lang="en-US" altLang="zh-CN"/>
+                      <a:rPr lang="en-US" altLang="zh-CN">
+                        <a:latin typeface="Cambria Math" panose="02040503050406030204" pitchFamily="18" charset="0"/>
+                      </a:rPr>
                       <m:t>=</m:t>
                     </m:r>
                     <m:f>
                       <m:fPr>
                         <m:ctrlPr>
-                          <a:rPr lang="zh-CN" altLang="zh-CN" i="1"/>
+                          <a:rPr lang="zh-CN" altLang="zh-CN" i="1">
+                            <a:latin typeface="Cambria Math" panose="02040503050406030204" pitchFamily="18" charset="0"/>
+                          </a:rPr>
                         </m:ctrlPr>
                       </m:fPr>
                       <m:num>
                         <m:r>
-                          <a:rPr lang="en-US" altLang="zh-CN" i="1"/>
+                          <a:rPr lang="en-US" altLang="zh-CN" i="1">
+                            <a:latin typeface="Cambria Math" panose="02040503050406030204" pitchFamily="18" charset="0"/>
+                          </a:rPr>
                           <m:t>𝑑</m:t>
                         </m:r>
                       </m:num>
                       <m:den>
                         <m:r>
-                          <a:rPr lang="en-US" altLang="zh-CN" i="1"/>
+                          <a:rPr lang="en-US" altLang="zh-CN" i="1">
+                            <a:latin typeface="Cambria Math" panose="02040503050406030204" pitchFamily="18" charset="0"/>
+                          </a:rPr>
                           <m:t>𝑠</m:t>
                         </m:r>
                       </m:den>
@@ -16810,11 +17585,15 @@
                 <a14:m>
                   <m:oMath xmlns:m="http://schemas.openxmlformats.org/officeDocument/2006/math">
                     <m:r>
-                      <a:rPr lang="en-US" altLang="zh-CN" i="1"/>
+                      <a:rPr lang="en-US" altLang="zh-CN" i="1">
+                        <a:latin typeface="Cambria Math" panose="02040503050406030204" pitchFamily="18" charset="0"/>
+                      </a:rPr>
                       <m:t>𝑑</m:t>
                     </m:r>
                     <m:r>
-                      <a:rPr lang="en-US" altLang="zh-CN"/>
+                      <a:rPr lang="en-US" altLang="zh-CN">
+                        <a:latin typeface="Cambria Math" panose="02040503050406030204" pitchFamily="18" charset="0"/>
+                      </a:rPr>
                       <m:t>=4,000+2,000+1,000=7,000</m:t>
                     </m:r>
                     <m:r>
@@ -16832,7 +17611,9 @@
                       <m:t>km</m:t>
                     </m:r>
                     <m:r>
-                      <a:rPr lang="en-US" altLang="zh-CN"/>
+                      <a:rPr lang="en-US" altLang="zh-CN">
+                        <a:latin typeface="Cambria Math" panose="02040503050406030204" pitchFamily="18" charset="0"/>
+                      </a:rPr>
                       <m:t>=7,000,000</m:t>
                     </m:r>
                     <m:r>
@@ -16864,35 +17645,47 @@
                     <m:sSub>
                       <m:sSubPr>
                         <m:ctrlPr>
-                          <a:rPr lang="zh-CN" altLang="zh-CN" i="1"/>
+                          <a:rPr lang="zh-CN" altLang="zh-CN" i="1">
+                            <a:latin typeface="Cambria Math" panose="02040503050406030204" pitchFamily="18" charset="0"/>
+                          </a:rPr>
                         </m:ctrlPr>
                       </m:sSubPr>
                       <m:e>
                         <m:r>
-                          <a:rPr lang="en-US" altLang="zh-CN" i="1"/>
+                          <a:rPr lang="en-US" altLang="zh-CN" i="1">
+                            <a:latin typeface="Cambria Math" panose="02040503050406030204" pitchFamily="18" charset="0"/>
+                          </a:rPr>
                           <m:t>𝑑</m:t>
                         </m:r>
                       </m:e>
                       <m:sub>
                         <m:r>
-                          <a:rPr lang="en-US" altLang="zh-CN" i="1"/>
+                          <a:rPr lang="en-US" altLang="zh-CN" i="1">
+                            <a:latin typeface="Cambria Math" panose="02040503050406030204" pitchFamily="18" charset="0"/>
+                          </a:rPr>
                           <m:t>𝑝𝑟𝑜𝑝</m:t>
                         </m:r>
                       </m:sub>
                     </m:sSub>
                     <m:r>
-                      <a:rPr lang="en-US" altLang="zh-CN"/>
+                      <a:rPr lang="en-US" altLang="zh-CN">
+                        <a:latin typeface="Cambria Math" panose="02040503050406030204" pitchFamily="18" charset="0"/>
+                      </a:rPr>
                       <m:t>=</m:t>
                     </m:r>
                     <m:f>
                       <m:fPr>
                         <m:ctrlPr>
-                          <a:rPr lang="zh-CN" altLang="zh-CN" i="1"/>
+                          <a:rPr lang="zh-CN" altLang="zh-CN" i="1">
+                            <a:latin typeface="Cambria Math" panose="02040503050406030204" pitchFamily="18" charset="0"/>
+                          </a:rPr>
                         </m:ctrlPr>
                       </m:fPr>
                       <m:num>
                         <m:r>
-                          <a:rPr lang="en-US" altLang="zh-CN"/>
+                          <a:rPr lang="en-US" altLang="zh-CN">
+                            <a:latin typeface="Cambria Math" panose="02040503050406030204" pitchFamily="18" charset="0"/>
+                          </a:rPr>
                           <m:t>7,000,000</m:t>
                         </m:r>
                         <m:r>
@@ -16912,24 +17705,32 @@
                       </m:num>
                       <m:den>
                         <m:r>
-                          <a:rPr lang="en-US" altLang="zh-CN"/>
+                          <a:rPr lang="en-US" altLang="zh-CN">
+                            <a:latin typeface="Cambria Math" panose="02040503050406030204" pitchFamily="18" charset="0"/>
+                          </a:rPr>
                           <m:t>2×</m:t>
                         </m:r>
                         <m:sSup>
                           <m:sSupPr>
                             <m:ctrlPr>
-                              <a:rPr lang="zh-CN" altLang="zh-CN" i="1"/>
+                              <a:rPr lang="zh-CN" altLang="zh-CN" i="1">
+                                <a:latin typeface="Cambria Math" panose="02040503050406030204" pitchFamily="18" charset="0"/>
+                              </a:rPr>
                             </m:ctrlPr>
                           </m:sSupPr>
                           <m:e>
                             <m:r>
-                              <a:rPr lang="en-US" altLang="zh-CN"/>
+                              <a:rPr lang="en-US" altLang="zh-CN">
+                                <a:latin typeface="Cambria Math" panose="02040503050406030204" pitchFamily="18" charset="0"/>
+                              </a:rPr>
                               <m:t>10</m:t>
                             </m:r>
                           </m:e>
                           <m:sup>
                             <m:r>
-                              <a:rPr lang="en-US" altLang="zh-CN"/>
+                              <a:rPr lang="en-US" altLang="zh-CN">
+                                <a:latin typeface="Cambria Math" panose="02040503050406030204" pitchFamily="18" charset="0"/>
+                              </a:rPr>
                               <m:t>8</m:t>
                             </m:r>
                           </m:sup>
@@ -16965,7 +17766,9 @@
                       </m:den>
                     </m:f>
                     <m:r>
-                      <a:rPr lang="en-US" altLang="zh-CN"/>
+                      <a:rPr lang="en-US" altLang="zh-CN">
+                        <a:latin typeface="Cambria Math" panose="02040503050406030204" pitchFamily="18" charset="0"/>
+                      </a:rPr>
                       <m:t>=0.035</m:t>
                     </m:r>
                     <m:r>
@@ -16983,19 +17786,27 @@
                       <m:t>seconds</m:t>
                     </m:r>
                     <m:r>
-                      <a:rPr lang="en-US" altLang="zh-CN"/>
+                      <a:rPr lang="en-US" altLang="zh-CN">
+                        <a:latin typeface="Cambria Math" panose="02040503050406030204" pitchFamily="18" charset="0"/>
+                      </a:rPr>
                       <m:t>=</m:t>
                     </m:r>
                     <m:r>
-                      <a:rPr lang="en-US" altLang="zh-CN" b="1"/>
+                      <a:rPr lang="en-US" altLang="zh-CN" b="1">
+                        <a:latin typeface="Cambria Math" panose="02040503050406030204" pitchFamily="18" charset="0"/>
+                      </a:rPr>
                       <m:t>𝟑𝟓</m:t>
                     </m:r>
                     <m:r>
-                      <a:rPr lang="en-US" altLang="zh-CN" b="1"/>
+                      <a:rPr lang="en-US" altLang="zh-CN" b="1">
+                        <a:latin typeface="Cambria Math" panose="02040503050406030204" pitchFamily="18" charset="0"/>
+                      </a:rPr>
                       <m:t> </m:t>
                     </m:r>
                     <m:r>
-                      <a:rPr lang="en-US" altLang="zh-CN" b="1"/>
+                      <a:rPr lang="en-US" altLang="zh-CN" b="1">
+                        <a:latin typeface="Cambria Math" panose="02040503050406030204" pitchFamily="18" charset="0"/>
+                      </a:rPr>
                       <m:t>𝐦𝐬</m:t>
                     </m:r>
                   </m:oMath>
@@ -17024,55 +17835,75 @@
                     <m:sSub>
                       <m:sSubPr>
                         <m:ctrlPr>
-                          <a:rPr lang="zh-CN" altLang="zh-CN" i="1"/>
+                          <a:rPr lang="zh-CN" altLang="zh-CN" i="1">
+                            <a:latin typeface="Cambria Math" panose="02040503050406030204" pitchFamily="18" charset="0"/>
+                          </a:rPr>
                         </m:ctrlPr>
                       </m:sSubPr>
                       <m:e>
                         <m:r>
-                          <a:rPr lang="en-US" altLang="zh-CN" i="1"/>
+                          <a:rPr lang="en-US" altLang="zh-CN" i="1">
+                            <a:latin typeface="Cambria Math" panose="02040503050406030204" pitchFamily="18" charset="0"/>
+                          </a:rPr>
                           <m:t>𝑑</m:t>
                         </m:r>
                       </m:e>
                       <m:sub>
                         <m:r>
-                          <a:rPr lang="en-US" altLang="zh-CN" i="1"/>
+                          <a:rPr lang="en-US" altLang="zh-CN" i="1">
+                            <a:latin typeface="Cambria Math" panose="02040503050406030204" pitchFamily="18" charset="0"/>
+                          </a:rPr>
                           <m:t>𝑡𝑜𝑡𝑎𝑙</m:t>
                         </m:r>
                       </m:sub>
                     </m:sSub>
                     <m:r>
-                      <a:rPr lang="en-US" altLang="zh-CN"/>
+                      <a:rPr lang="en-US" altLang="zh-CN">
+                        <a:latin typeface="Cambria Math" panose="02040503050406030204" pitchFamily="18" charset="0"/>
+                      </a:rPr>
                       <m:t>=</m:t>
                     </m:r>
                     <m:r>
-                      <a:rPr lang="en-US" altLang="zh-CN" i="1"/>
+                      <a:rPr lang="en-US" altLang="zh-CN" i="1">
+                        <a:latin typeface="Cambria Math" panose="02040503050406030204" pitchFamily="18" charset="0"/>
+                      </a:rPr>
                       <m:t>𝑁</m:t>
                     </m:r>
                     <m:r>
-                      <a:rPr lang="en-US" altLang="zh-CN"/>
+                      <a:rPr lang="en-US" altLang="zh-CN">
+                        <a:latin typeface="Cambria Math" panose="02040503050406030204" pitchFamily="18" charset="0"/>
+                      </a:rPr>
                       <m:t>×</m:t>
                     </m:r>
                     <m:sSub>
                       <m:sSubPr>
                         <m:ctrlPr>
-                          <a:rPr lang="zh-CN" altLang="zh-CN" i="1"/>
+                          <a:rPr lang="zh-CN" altLang="zh-CN" i="1">
+                            <a:latin typeface="Cambria Math" panose="02040503050406030204" pitchFamily="18" charset="0"/>
+                          </a:rPr>
                         </m:ctrlPr>
                       </m:sSubPr>
                       <m:e>
                         <m:r>
-                          <a:rPr lang="en-US" altLang="zh-CN" i="1"/>
+                          <a:rPr lang="en-US" altLang="zh-CN" i="1">
+                            <a:latin typeface="Cambria Math" panose="02040503050406030204" pitchFamily="18" charset="0"/>
+                          </a:rPr>
                           <m:t>𝑑</m:t>
                         </m:r>
                       </m:e>
                       <m:sub>
                         <m:r>
-                          <a:rPr lang="en-US" altLang="zh-CN" i="1"/>
+                          <a:rPr lang="en-US" altLang="zh-CN" i="1">
+                            <a:latin typeface="Cambria Math" panose="02040503050406030204" pitchFamily="18" charset="0"/>
+                          </a:rPr>
                           <m:t>𝑡𝑟𝑎𝑛𝑠</m:t>
                         </m:r>
                       </m:sub>
                     </m:sSub>
                     <m:r>
-                      <a:rPr lang="en-US" altLang="zh-CN"/>
+                      <a:rPr lang="en-US" altLang="zh-CN">
+                        <a:latin typeface="Cambria Math" panose="02040503050406030204" pitchFamily="18" charset="0"/>
+                      </a:rPr>
                       <m:t>+</m:t>
                     </m:r>
                     <m:r>
@@ -17092,18 +17923,24 @@
                     <m:sSub>
                       <m:sSubPr>
                         <m:ctrlPr>
-                          <a:rPr lang="zh-CN" altLang="zh-CN" i="1"/>
+                          <a:rPr lang="zh-CN" altLang="zh-CN" i="1">
+                            <a:latin typeface="Cambria Math" panose="02040503050406030204" pitchFamily="18" charset="0"/>
+                          </a:rPr>
                         </m:ctrlPr>
                       </m:sSubPr>
                       <m:e>
                         <m:r>
-                          <a:rPr lang="en-US" altLang="zh-CN" i="1"/>
+                          <a:rPr lang="en-US" altLang="zh-CN" i="1">
+                            <a:latin typeface="Cambria Math" panose="02040503050406030204" pitchFamily="18" charset="0"/>
+                          </a:rPr>
                           <m:t>𝑑</m:t>
                         </m:r>
                       </m:e>
                       <m:sub>
                         <m:r>
-                          <a:rPr lang="en-US" altLang="zh-CN" i="1"/>
+                          <a:rPr lang="en-US" altLang="zh-CN" i="1">
+                            <a:latin typeface="Cambria Math" panose="02040503050406030204" pitchFamily="18" charset="0"/>
+                          </a:rPr>
                           <m:t>𝑝𝑟𝑜𝑝</m:t>
                         </m:r>
                       </m:sub>
@@ -17117,7 +17954,9 @@
                 <a14:m>
                   <m:oMath xmlns:m="http://schemas.openxmlformats.org/officeDocument/2006/math">
                     <m:r>
-                      <a:rPr lang="en-US" altLang="zh-CN" i="1"/>
+                      <a:rPr lang="en-US" altLang="zh-CN" i="1">
+                        <a:latin typeface="Cambria Math" panose="02040503050406030204" pitchFamily="18" charset="0"/>
+                      </a:rPr>
                       <m:t>𝑁</m:t>
                     </m:r>
                   </m:oMath>
@@ -17145,7 +17984,9 @@
                 <a14:m>
                   <m:oMath xmlns:m="http://schemas.openxmlformats.org/officeDocument/2006/math">
                     <m:r>
-                      <a:rPr lang="en-US" altLang="zh-CN"/>
+                      <a:rPr lang="en-US" altLang="zh-CN">
+                        <a:latin typeface="Cambria Math" panose="02040503050406030204" pitchFamily="18" charset="0"/>
+                      </a:rPr>
                       <m:t>3×1.2</m:t>
                     </m:r>
                     <m:r>
@@ -17163,7 +18004,9 @@
                       <m:t>ms</m:t>
                     </m:r>
                     <m:r>
-                      <a:rPr lang="en-US" altLang="zh-CN"/>
+                      <a:rPr lang="en-US" altLang="zh-CN">
+                        <a:latin typeface="Cambria Math" panose="02040503050406030204" pitchFamily="18" charset="0"/>
+                      </a:rPr>
                       <m:t>=3.6</m:t>
                     </m:r>
                     <m:r>
@@ -17195,24 +18038,32 @@
                     <m:sSub>
                       <m:sSubPr>
                         <m:ctrlPr>
-                          <a:rPr lang="zh-CN" altLang="zh-CN" i="1"/>
+                          <a:rPr lang="zh-CN" altLang="zh-CN" i="1">
+                            <a:latin typeface="Cambria Math" panose="02040503050406030204" pitchFamily="18" charset="0"/>
+                          </a:rPr>
                         </m:ctrlPr>
                       </m:sSubPr>
                       <m:e>
                         <m:r>
-                          <a:rPr lang="en-US" altLang="zh-CN" i="1"/>
+                          <a:rPr lang="en-US" altLang="zh-CN" i="1">
+                            <a:latin typeface="Cambria Math" panose="02040503050406030204" pitchFamily="18" charset="0"/>
+                          </a:rPr>
                           <m:t>𝑑</m:t>
                         </m:r>
                       </m:e>
                       <m:sub>
                         <m:r>
-                          <a:rPr lang="en-US" altLang="zh-CN" i="1"/>
+                          <a:rPr lang="en-US" altLang="zh-CN" i="1">
+                            <a:latin typeface="Cambria Math" panose="02040503050406030204" pitchFamily="18" charset="0"/>
+                          </a:rPr>
                           <m:t>𝑡𝑜𝑡𝑎𝑙</m:t>
                         </m:r>
                       </m:sub>
                     </m:sSub>
                     <m:r>
-                      <a:rPr lang="en-US" altLang="zh-CN"/>
+                      <a:rPr lang="en-US" altLang="zh-CN">
+                        <a:latin typeface="Cambria Math" panose="02040503050406030204" pitchFamily="18" charset="0"/>
+                      </a:rPr>
                       <m:t>=3.6</m:t>
                     </m:r>
                     <m:r>
@@ -17230,7 +18081,9 @@
                       <m:t>ms</m:t>
                     </m:r>
                     <m:r>
-                      <a:rPr lang="en-US" altLang="zh-CN"/>
+                      <a:rPr lang="en-US" altLang="zh-CN">
+                        <a:latin typeface="Cambria Math" panose="02040503050406030204" pitchFamily="18" charset="0"/>
+                      </a:rPr>
                       <m:t>+35</m:t>
                     </m:r>
                     <m:r>
@@ -17248,27 +18101,39 @@
                       <m:t>ms</m:t>
                     </m:r>
                     <m:r>
-                      <a:rPr lang="en-US" altLang="zh-CN"/>
+                      <a:rPr lang="en-US" altLang="zh-CN">
+                        <a:latin typeface="Cambria Math" panose="02040503050406030204" pitchFamily="18" charset="0"/>
+                      </a:rPr>
                       <m:t>=</m:t>
                     </m:r>
                     <m:r>
-                      <a:rPr lang="en-US" altLang="zh-CN" b="1"/>
+                      <a:rPr lang="en-US" altLang="zh-CN" b="1">
+                        <a:latin typeface="Cambria Math" panose="02040503050406030204" pitchFamily="18" charset="0"/>
+                      </a:rPr>
                       <m:t>𝟑𝟖</m:t>
                     </m:r>
                     <m:r>
-                      <a:rPr lang="en-US" altLang="zh-CN" b="1"/>
+                      <a:rPr lang="en-US" altLang="zh-CN" b="1">
+                        <a:latin typeface="Cambria Math" panose="02040503050406030204" pitchFamily="18" charset="0"/>
+                      </a:rPr>
                       <m:t>.</m:t>
                     </m:r>
                     <m:r>
-                      <a:rPr lang="en-US" altLang="zh-CN" b="1"/>
+                      <a:rPr lang="en-US" altLang="zh-CN" b="1">
+                        <a:latin typeface="Cambria Math" panose="02040503050406030204" pitchFamily="18" charset="0"/>
+                      </a:rPr>
                       <m:t>𝟔</m:t>
                     </m:r>
                     <m:r>
-                      <a:rPr lang="en-US" altLang="zh-CN" b="1"/>
+                      <a:rPr lang="en-US" altLang="zh-CN" b="1">
+                        <a:latin typeface="Cambria Math" panose="02040503050406030204" pitchFamily="18" charset="0"/>
+                      </a:rPr>
                       <m:t> </m:t>
                     </m:r>
                     <m:r>
-                      <a:rPr lang="en-US" altLang="zh-CN" b="1"/>
+                      <a:rPr lang="en-US" altLang="zh-CN" b="1">
+                        <a:latin typeface="Cambria Math" panose="02040503050406030204" pitchFamily="18" charset="0"/>
+                      </a:rPr>
                       <m:t>𝐦𝐬</m:t>
                     </m:r>
                   </m:oMath>
@@ -17281,7 +18146,7 @@
             </p:txBody>
           </p:sp>
         </mc:Choice>
-        <mc:Fallback>
+        <mc:Fallback xmlns="">
           <p:sp>
             <p:nvSpPr>
               <p:cNvPr id="4" name="Content Placeholder 3">
@@ -19282,8 +20147,8 @@
           </a:p>
         </p:txBody>
       </p:sp>
-      <mc:AlternateContent xmlns:mc="http://schemas.openxmlformats.org/markup-compatibility/2006">
-        <mc:Choice xmlns:a14="http://schemas.microsoft.com/office/drawing/2010/main" Requires="a14">
+      <mc:AlternateContent xmlns:mc="http://schemas.openxmlformats.org/markup-compatibility/2006" xmlns:a14="http://schemas.microsoft.com/office/drawing/2010/main">
+        <mc:Choice Requires="a14">
           <p:graphicFrame>
             <p:nvGraphicFramePr>
               <p:cNvPr id="5" name="Google Shape;519;p34">
@@ -20653,7 +21518,7 @@
             </a:graphic>
           </p:graphicFrame>
         </mc:Choice>
-        <mc:Fallback>
+        <mc:Fallback xmlns="">
           <p:graphicFrame>
             <p:nvGraphicFramePr>
               <p:cNvPr id="5" name="Google Shape;519;p34">
@@ -22745,14 +23610,20 @@
           <p:nvPr/>
         </p:nvPicPr>
         <p:blipFill>
-          <a:blip r:embed="rId2"/>
+          <a:blip r:embed="rId2">
+            <a:extLst>
+              <a:ext uri="{28A0092B-C50C-407E-A947-70E740481C1C}">
+                <a14:useLocalDpi xmlns:a14="http://schemas.microsoft.com/office/drawing/2010/main" val="0"/>
+              </a:ext>
+            </a:extLst>
+          </a:blip>
           <a:srcRect/>
           <a:stretch/>
         </p:blipFill>
         <p:spPr>
           <a:xfrm>
-            <a:off x="6248400" y="1752600"/>
-            <a:ext cx="5864832" cy="3068519"/>
+            <a:off x="6400800" y="1752600"/>
+            <a:ext cx="5712155" cy="2988919"/>
           </a:xfrm>
           <a:prstGeom prst="rect">
             <a:avLst/>
@@ -22873,12 +23744,12 @@
         <p:spPr>
           <a:xfrm>
             <a:off x="609600" y="1219200"/>
-            <a:ext cx="5791200" cy="5137150"/>
+            <a:ext cx="6260578" cy="5137150"/>
           </a:xfrm>
         </p:spPr>
         <p:txBody>
           <a:bodyPr>
-            <a:normAutofit fontScale="62500" lnSpcReduction="20000"/>
+            <a:normAutofit fontScale="70000" lnSpcReduction="20000"/>
           </a:bodyPr>
           <a:lstStyle/>
           <a:p>
@@ -22985,8 +23856,8 @@
         </p:blipFill>
         <p:spPr>
           <a:xfrm>
-            <a:off x="6248400" y="1752600"/>
-            <a:ext cx="5864832" cy="3068519"/>
+            <a:off x="6870178" y="1752601"/>
+            <a:ext cx="5243053" cy="2743200"/>
           </a:xfrm>
           <a:prstGeom prst="rect">
             <a:avLst/>

--- a/Exams/CSC175  Sp26 Midterm Sample Questions.pptx
+++ b/Exams/CSC175  Sp26 Midterm Sample Questions.pptx
@@ -666,7 +666,7 @@
             <a:fld id="{2AEAFE1F-9E52-45C8-9793-E819F0044A1C}" type="datetimeFigureOut">
               <a:rPr lang="en-US" smtClean="0"/>
               <a:pPr/>
-              <a:t>3/30/2026</a:t>
+              <a:t>3/31/2026</a:t>
             </a:fld>
             <a:endParaRPr lang="en-US"/>
           </a:p>
@@ -1686,7 +1686,7 @@
             <a:fld id="{2E26774B-6488-4259-9342-6CBDB2BFD4E4}" type="datetime1">
               <a:rPr lang="en-US" smtClean="0"/>
               <a:pPr eaLnBrk="1" latinLnBrk="0" hangingPunct="1"/>
-              <a:t>3/30/2026</a:t>
+              <a:t>3/31/2026</a:t>
             </a:fld>
             <a:endParaRPr lang="en-US" sz="1600" dirty="0"/>
           </a:p>
@@ -2047,7 +2047,7 @@
             <a:fld id="{9B2E7711-0BE3-4AFC-959B-CB5C31A7AE48}" type="datetime1">
               <a:rPr lang="en-US" smtClean="0"/>
               <a:pPr eaLnBrk="1" latinLnBrk="0" hangingPunct="1"/>
-              <a:t>3/30/2026</a:t>
+              <a:t>3/31/2026</a:t>
             </a:fld>
             <a:endParaRPr lang="en-US"/>
           </a:p>
@@ -2224,7 +2224,7 @@
             <a:fld id="{825AAB62-A572-4E37-B772-B4A75ADE0B18}" type="datetime1">
               <a:rPr lang="en-US" smtClean="0"/>
               <a:pPr eaLnBrk="1" latinLnBrk="0" hangingPunct="1"/>
-              <a:t>3/30/2026</a:t>
+              <a:t>3/31/2026</a:t>
             </a:fld>
             <a:endParaRPr lang="en-US"/>
           </a:p>
@@ -2461,7 +2461,7 @@
             <a:fld id="{B0F52420-10F8-488E-969A-A9BE388BE9C4}" type="datetime1">
               <a:rPr lang="en-US" smtClean="0"/>
               <a:pPr eaLnBrk="1" latinLnBrk="0" hangingPunct="1"/>
-              <a:t>3/30/2026</a:t>
+              <a:t>3/31/2026</a:t>
             </a:fld>
             <a:endParaRPr lang="en-US" dirty="0"/>
           </a:p>
@@ -2732,7 +2732,7 @@
             <a:fld id="{96E96F24-58CF-47DA-907C-A9CD6353E425}" type="datetime1">
               <a:rPr lang="en-US" smtClean="0"/>
               <a:pPr eaLnBrk="1" latinLnBrk="0" hangingPunct="1"/>
-              <a:t>3/30/2026</a:t>
+              <a:t>3/31/2026</a:t>
             </a:fld>
             <a:endParaRPr lang="en-US" dirty="0"/>
           </a:p>
@@ -2954,7 +2954,7 @@
             <a:fld id="{53AE4463-726A-4A35-9F46-98893432A3F9}" type="datetime1">
               <a:rPr lang="en-US" smtClean="0"/>
               <a:pPr eaLnBrk="1" latinLnBrk="0" hangingPunct="1"/>
-              <a:t>3/30/2026</a:t>
+              <a:t>3/31/2026</a:t>
             </a:fld>
             <a:endParaRPr lang="en-US"/>
           </a:p>
@@ -3308,7 +3308,7 @@
             <a:fld id="{FDF404D0-E306-4E90-90E3-E44D26246FFC}" type="datetime1">
               <a:rPr lang="en-US" smtClean="0"/>
               <a:pPr eaLnBrk="1" latinLnBrk="0" hangingPunct="1"/>
-              <a:t>3/30/2026</a:t>
+              <a:t>3/31/2026</a:t>
             </a:fld>
             <a:endParaRPr lang="en-US"/>
           </a:p>
@@ -3542,7 +3542,7 @@
             <a:fld id="{1485DA14-76F0-4D93-83FB-7878C79A1986}" type="datetime1">
               <a:rPr lang="en-US" smtClean="0"/>
               <a:pPr eaLnBrk="1" latinLnBrk="0" hangingPunct="1"/>
-              <a:t>3/30/2026</a:t>
+              <a:t>3/31/2026</a:t>
             </a:fld>
             <a:endParaRPr lang="en-US"/>
           </a:p>
@@ -3685,7 +3685,7 @@
             <a:fld id="{A15E552D-49E1-496B-B79C-E100986B8B5F}" type="datetime1">
               <a:rPr lang="en-US" smtClean="0"/>
               <a:pPr eaLnBrk="1" latinLnBrk="0" hangingPunct="1"/>
-              <a:t>3/30/2026</a:t>
+              <a:t>3/31/2026</a:t>
             </a:fld>
             <a:endParaRPr lang="en-US"/>
           </a:p>
@@ -3964,7 +3964,7 @@
             <a:fld id="{CEC72505-1551-4A98-97CD-F520B07184AD}" type="datetime1">
               <a:rPr lang="en-US" smtClean="0"/>
               <a:pPr eaLnBrk="1" latinLnBrk="0" hangingPunct="1"/>
-              <a:t>3/30/2026</a:t>
+              <a:t>3/31/2026</a:t>
             </a:fld>
             <a:endParaRPr lang="en-US"/>
           </a:p>
@@ -4373,7 +4373,7 @@
             <a:fld id="{7218F47B-BA16-4F20-B5BA-73F598D94B51}" type="datetime1">
               <a:rPr lang="en-US" smtClean="0"/>
               <a:pPr eaLnBrk="1" latinLnBrk="0" hangingPunct="1"/>
-              <a:t>3/30/2026</a:t>
+              <a:t>3/31/2026</a:t>
             </a:fld>
             <a:endParaRPr lang="en-US"/>
           </a:p>
@@ -4712,7 +4712,7 @@
             <a:fld id="{4F3CB514-9CA6-4E48-9463-A430D31CFDE3}" type="datetime1">
               <a:rPr lang="en-US" smtClean="0"/>
               <a:pPr eaLnBrk="1" latinLnBrk="0" hangingPunct="1"/>
-              <a:t>3/30/2026</a:t>
+              <a:t>3/31/2026</a:t>
             </a:fld>
             <a:endParaRPr lang="en-US" sz="1400" dirty="0">
               <a:solidFill>
@@ -9612,7 +9612,15 @@
           <a:p>
             <a:r>
               <a:rPr lang="en-US" altLang="zh-CN" dirty="0"/>
-              <a:t>Second row: We want to use a prefix that allows for both IP prefixes 128.1.1.0/24 and 128.1.2.0/24 to map to port 2. We see that bits 17 to 24 (3rd octet from the left) for both prefixes are 00000001 and 0000010, respectively. Therefore, bits 1 to 22 are the same for the two IP addresses, so we can have the IP prefix 128.1.0.0/22.</a:t>
+              <a:t>Second row</a:t>
+            </a:r>
+            <a:r>
+              <a:rPr lang="en-US" altLang="zh-CN"/>
+              <a:t>:  We </a:t>
+            </a:r>
+            <a:r>
+              <a:rPr lang="en-US" altLang="zh-CN" dirty="0"/>
+              <a:t>want to use a prefix that allows for both IP prefixes 128.1.1.0/24 and 128.1.2.0/24 to map to port 2. We see that bits 17 to 24 (3rd octet from the left) for both prefixes are 00000001 and 0000010, respectively. Therefore, bits 1 to 22 are the same for the two IP addresses, so we can have the IP prefix 128.1.0.0/22.</a:t>
             </a:r>
           </a:p>
           <a:p>
@@ -10201,7 +10209,7 @@
             </a:r>
             <a:r>
               <a:rPr lang="en-US" altLang="zh-CN" dirty="0"/>
-              <a:t> out of a forwarding table with these three prefixes: 17.0.0.0/8, 17.1.0.0/16, 17.1.1.0/24. Draw the resulting </a:t>
+              <a:t> out of a forwarding table with these three prefixes: 17.0.0.0/8, 17.1.0.0/16, 17.1.1.0/24.  What is the height of the resulting binary </a:t>
             </a:r>
             <a:r>
               <a:rPr lang="en-US" altLang="zh-CN" dirty="0" err="1"/>
@@ -10209,7 +10217,7 @@
             </a:r>
             <a:r>
               <a:rPr lang="en-US" altLang="zh-CN" dirty="0"/>
-              <a:t>. What is the height of the resulting binary </a:t>
+              <a:t>? Draw or verbally describe the resulting </a:t>
             </a:r>
             <a:r>
               <a:rPr lang="en-US" altLang="zh-CN" dirty="0" err="1"/>
@@ -10217,7 +10225,7 @@
             </a:r>
             <a:r>
               <a:rPr lang="en-US" altLang="zh-CN" dirty="0"/>
-              <a:t>?</a:t>
+              <a:t>. </a:t>
             </a:r>
           </a:p>
           <a:p>
@@ -10722,7 +10730,15 @@
             </a:r>
             <a:r>
               <a:rPr lang="en-US" altLang="zh-CN" dirty="0"/>
-              <a:t>? What is the earliest branching point?</a:t>
+              <a:t>? Draw or verbally describe the resulting </a:t>
+            </a:r>
+            <a:r>
+              <a:rPr lang="en-US" altLang="zh-CN" dirty="0" err="1"/>
+              <a:t>trie</a:t>
+            </a:r>
+            <a:r>
+              <a:rPr lang="en-US" altLang="zh-CN" dirty="0"/>
+              <a:t>. </a:t>
             </a:r>
           </a:p>
           <a:p>
@@ -17245,7 +17261,25 @@
                       <a:rPr lang="en-US" altLang="zh-CN">
                         <a:latin typeface="Cambria Math" panose="02040503050406030204" pitchFamily="18" charset="0"/>
                       </a:rPr>
-                      <m:t>=1,500</m:t>
+                      <m:t>=</m:t>
+                    </m:r>
+                    <m:r>
+                      <a:rPr lang="en-US" altLang="zh-CN">
+                        <a:latin typeface="Cambria Math" panose="02040503050406030204" pitchFamily="18" charset="0"/>
+                      </a:rPr>
+                      <m:t>1</m:t>
+                    </m:r>
+                    <m:r>
+                      <a:rPr lang="en-US" altLang="zh-CN">
+                        <a:latin typeface="Cambria Math" panose="02040503050406030204" pitchFamily="18" charset="0"/>
+                      </a:rPr>
+                      <m:t>,</m:t>
+                    </m:r>
+                    <m:r>
+                      <a:rPr lang="en-US" altLang="zh-CN">
+                        <a:latin typeface="Cambria Math" panose="02040503050406030204" pitchFamily="18" charset="0"/>
+                      </a:rPr>
+                      <m:t>500</m:t>
                     </m:r>
                     <m:r>
                       <m:rPr>
@@ -17265,7 +17299,13 @@
                       <a:rPr lang="en-US" altLang="zh-CN">
                         <a:latin typeface="Cambria Math" panose="02040503050406030204" pitchFamily="18" charset="0"/>
                       </a:rPr>
-                      <m:t>×8</m:t>
+                      <m:t>×</m:t>
+                    </m:r>
+                    <m:r>
+                      <a:rPr lang="en-US" altLang="zh-CN">
+                        <a:latin typeface="Cambria Math" panose="02040503050406030204" pitchFamily="18" charset="0"/>
+                      </a:rPr>
+                      <m:t>8</m:t>
                     </m:r>
                     <m:r>
                       <m:rPr>
@@ -17299,7 +17339,25 @@
                       <a:rPr lang="en-US" altLang="zh-CN">
                         <a:latin typeface="Cambria Math" panose="02040503050406030204" pitchFamily="18" charset="0"/>
                       </a:rPr>
-                      <m:t>=12,000</m:t>
+                      <m:t>=</m:t>
+                    </m:r>
+                    <m:r>
+                      <a:rPr lang="en-US" altLang="zh-CN">
+                        <a:latin typeface="Cambria Math" panose="02040503050406030204" pitchFamily="18" charset="0"/>
+                      </a:rPr>
+                      <m:t>12</m:t>
+                    </m:r>
+                    <m:r>
+                      <a:rPr lang="en-US" altLang="zh-CN">
+                        <a:latin typeface="Cambria Math" panose="02040503050406030204" pitchFamily="18" charset="0"/>
+                      </a:rPr>
+                      <m:t>,</m:t>
+                    </m:r>
+                    <m:r>
+                      <a:rPr lang="en-US" altLang="zh-CN">
+                        <a:latin typeface="Cambria Math" panose="02040503050406030204" pitchFamily="18" charset="0"/>
+                      </a:rPr>
+                      <m:t>000</m:t>
                     </m:r>
                     <m:r>
                       <m:rPr>
@@ -17337,7 +17395,13 @@
                       <a:rPr lang="en-US" altLang="zh-CN">
                         <a:latin typeface="Cambria Math" panose="02040503050406030204" pitchFamily="18" charset="0"/>
                       </a:rPr>
-                      <m:t>=10</m:t>
+                      <m:t>=</m:t>
+                    </m:r>
+                    <m:r>
+                      <a:rPr lang="en-US" altLang="zh-CN">
+                        <a:latin typeface="Cambria Math" panose="02040503050406030204" pitchFamily="18" charset="0"/>
+                      </a:rPr>
+                      <m:t>10</m:t>
                     </m:r>
                     <m:r>
                       <m:rPr>
@@ -17357,7 +17421,37 @@
                       <a:rPr lang="en-US" altLang="zh-CN">
                         <a:latin typeface="Cambria Math" panose="02040503050406030204" pitchFamily="18" charset="0"/>
                       </a:rPr>
-                      <m:t>=10,000,000</m:t>
+                      <m:t>=</m:t>
+                    </m:r>
+                    <m:r>
+                      <a:rPr lang="en-US" altLang="zh-CN">
+                        <a:latin typeface="Cambria Math" panose="02040503050406030204" pitchFamily="18" charset="0"/>
+                      </a:rPr>
+                      <m:t>10</m:t>
+                    </m:r>
+                    <m:r>
+                      <a:rPr lang="en-US" altLang="zh-CN">
+                        <a:latin typeface="Cambria Math" panose="02040503050406030204" pitchFamily="18" charset="0"/>
+                      </a:rPr>
+                      <m:t>,</m:t>
+                    </m:r>
+                    <m:r>
+                      <a:rPr lang="en-US" altLang="zh-CN">
+                        <a:latin typeface="Cambria Math" panose="02040503050406030204" pitchFamily="18" charset="0"/>
+                      </a:rPr>
+                      <m:t>000</m:t>
+                    </m:r>
+                    <m:r>
+                      <a:rPr lang="en-US" altLang="zh-CN">
+                        <a:latin typeface="Cambria Math" panose="02040503050406030204" pitchFamily="18" charset="0"/>
+                      </a:rPr>
+                      <m:t>,</m:t>
+                    </m:r>
+                    <m:r>
+                      <a:rPr lang="en-US" altLang="zh-CN">
+                        <a:latin typeface="Cambria Math" panose="02040503050406030204" pitchFamily="18" charset="0"/>
+                      </a:rPr>
+                      <m:t>000</m:t>
                     </m:r>
                     <m:r>
                       <m:rPr>
@@ -17425,7 +17519,19 @@
                           <a:rPr lang="en-US" altLang="zh-CN">
                             <a:latin typeface="Cambria Math" panose="02040503050406030204" pitchFamily="18" charset="0"/>
                           </a:rPr>
-                          <m:t>12,000</m:t>
+                          <m:t>12</m:t>
+                        </m:r>
+                        <m:r>
+                          <a:rPr lang="en-US" altLang="zh-CN">
+                            <a:latin typeface="Cambria Math" panose="02040503050406030204" pitchFamily="18" charset="0"/>
+                          </a:rPr>
+                          <m:t>,</m:t>
+                        </m:r>
+                        <m:r>
+                          <a:rPr lang="en-US" altLang="zh-CN">
+                            <a:latin typeface="Cambria Math" panose="02040503050406030204" pitchFamily="18" charset="0"/>
+                          </a:rPr>
+                          <m:t>000</m:t>
                         </m:r>
                       </m:num>
                       <m:den>
@@ -17433,7 +17539,31 @@
                           <a:rPr lang="en-US" altLang="zh-CN">
                             <a:latin typeface="Cambria Math" panose="02040503050406030204" pitchFamily="18" charset="0"/>
                           </a:rPr>
-                          <m:t>10,000,000</m:t>
+                          <m:t>10</m:t>
+                        </m:r>
+                        <m:r>
+                          <a:rPr lang="en-US" altLang="zh-CN">
+                            <a:latin typeface="Cambria Math" panose="02040503050406030204" pitchFamily="18" charset="0"/>
+                          </a:rPr>
+                          <m:t>,</m:t>
+                        </m:r>
+                        <m:r>
+                          <a:rPr lang="en-US" altLang="zh-CN">
+                            <a:latin typeface="Cambria Math" panose="02040503050406030204" pitchFamily="18" charset="0"/>
+                          </a:rPr>
+                          <m:t>000</m:t>
+                        </m:r>
+                        <m:r>
+                          <a:rPr lang="en-US" altLang="zh-CN">
+                            <a:latin typeface="Cambria Math" panose="02040503050406030204" pitchFamily="18" charset="0"/>
+                          </a:rPr>
+                          <m:t>,</m:t>
+                        </m:r>
+                        <m:r>
+                          <a:rPr lang="en-US" altLang="zh-CN">
+                            <a:latin typeface="Cambria Math" panose="02040503050406030204" pitchFamily="18" charset="0"/>
+                          </a:rPr>
+                          <m:t>000</m:t>
                         </m:r>
                       </m:den>
                     </m:f>
@@ -17441,7 +17571,25 @@
                       <a:rPr lang="en-US" altLang="zh-CN">
                         <a:latin typeface="Cambria Math" panose="02040503050406030204" pitchFamily="18" charset="0"/>
                       </a:rPr>
-                      <m:t>=0.0012</m:t>
+                      <m:t>=</m:t>
+                    </m:r>
+                    <m:r>
+                      <a:rPr lang="en-US" altLang="zh-CN">
+                        <a:latin typeface="Cambria Math" panose="02040503050406030204" pitchFamily="18" charset="0"/>
+                      </a:rPr>
+                      <m:t>0</m:t>
+                    </m:r>
+                    <m:r>
+                      <a:rPr lang="en-US" altLang="zh-CN">
+                        <a:latin typeface="Cambria Math" panose="02040503050406030204" pitchFamily="18" charset="0"/>
+                      </a:rPr>
+                      <m:t>.</m:t>
+                    </m:r>
+                    <m:r>
+                      <a:rPr lang="en-US" altLang="zh-CN">
+                        <a:latin typeface="Cambria Math" panose="02040503050406030204" pitchFamily="18" charset="0"/>
+                      </a:rPr>
+                      <m:t>0012</m:t>
                     </m:r>
                     <m:r>
                       <m:rPr>
@@ -17594,7 +17742,97 @@
                       <a:rPr lang="en-US" altLang="zh-CN">
                         <a:latin typeface="Cambria Math" panose="02040503050406030204" pitchFamily="18" charset="0"/>
                       </a:rPr>
-                      <m:t>=4,000+2,000+1,000=7,000</m:t>
+                      <m:t>=</m:t>
+                    </m:r>
+                    <m:r>
+                      <a:rPr lang="en-US" altLang="zh-CN">
+                        <a:latin typeface="Cambria Math" panose="02040503050406030204" pitchFamily="18" charset="0"/>
+                      </a:rPr>
+                      <m:t>4</m:t>
+                    </m:r>
+                    <m:r>
+                      <a:rPr lang="en-US" altLang="zh-CN">
+                        <a:latin typeface="Cambria Math" panose="02040503050406030204" pitchFamily="18" charset="0"/>
+                      </a:rPr>
+                      <m:t>,</m:t>
+                    </m:r>
+                    <m:r>
+                      <a:rPr lang="en-US" altLang="zh-CN">
+                        <a:latin typeface="Cambria Math" panose="02040503050406030204" pitchFamily="18" charset="0"/>
+                      </a:rPr>
+                      <m:t>000</m:t>
+                    </m:r>
+                    <m:r>
+                      <a:rPr lang="en-US" altLang="zh-CN">
+                        <a:latin typeface="Cambria Math" panose="02040503050406030204" pitchFamily="18" charset="0"/>
+                      </a:rPr>
+                      <m:t>+</m:t>
+                    </m:r>
+                    <m:r>
+                      <a:rPr lang="en-US" altLang="zh-CN">
+                        <a:latin typeface="Cambria Math" panose="02040503050406030204" pitchFamily="18" charset="0"/>
+                      </a:rPr>
+                      <m:t>2</m:t>
+                    </m:r>
+                    <m:r>
+                      <a:rPr lang="en-US" altLang="zh-CN">
+                        <a:latin typeface="Cambria Math" panose="02040503050406030204" pitchFamily="18" charset="0"/>
+                      </a:rPr>
+                      <m:t>,</m:t>
+                    </m:r>
+                    <m:r>
+                      <a:rPr lang="en-US" altLang="zh-CN">
+                        <a:latin typeface="Cambria Math" panose="02040503050406030204" pitchFamily="18" charset="0"/>
+                      </a:rPr>
+                      <m:t>000</m:t>
+                    </m:r>
+                    <m:r>
+                      <a:rPr lang="en-US" altLang="zh-CN">
+                        <a:latin typeface="Cambria Math" panose="02040503050406030204" pitchFamily="18" charset="0"/>
+                      </a:rPr>
+                      <m:t>+</m:t>
+                    </m:r>
+                    <m:r>
+                      <a:rPr lang="en-US" altLang="zh-CN">
+                        <a:latin typeface="Cambria Math" panose="02040503050406030204" pitchFamily="18" charset="0"/>
+                      </a:rPr>
+                      <m:t>1</m:t>
+                    </m:r>
+                    <m:r>
+                      <a:rPr lang="en-US" altLang="zh-CN">
+                        <a:latin typeface="Cambria Math" panose="02040503050406030204" pitchFamily="18" charset="0"/>
+                      </a:rPr>
+                      <m:t>,</m:t>
+                    </m:r>
+                    <m:r>
+                      <a:rPr lang="en-US" altLang="zh-CN">
+                        <a:latin typeface="Cambria Math" panose="02040503050406030204" pitchFamily="18" charset="0"/>
+                      </a:rPr>
+                      <m:t>000</m:t>
+                    </m:r>
+                    <m:r>
+                      <a:rPr lang="en-US" altLang="zh-CN">
+                        <a:latin typeface="Cambria Math" panose="02040503050406030204" pitchFamily="18" charset="0"/>
+                      </a:rPr>
+                      <m:t>=</m:t>
+                    </m:r>
+                    <m:r>
+                      <a:rPr lang="en-US" altLang="zh-CN">
+                        <a:latin typeface="Cambria Math" panose="02040503050406030204" pitchFamily="18" charset="0"/>
+                      </a:rPr>
+                      <m:t>7</m:t>
+                    </m:r>
+                    <m:r>
+                      <a:rPr lang="en-US" altLang="zh-CN">
+                        <a:latin typeface="Cambria Math" panose="02040503050406030204" pitchFamily="18" charset="0"/>
+                      </a:rPr>
+                      <m:t>,</m:t>
+                    </m:r>
+                    <m:r>
+                      <a:rPr lang="en-US" altLang="zh-CN">
+                        <a:latin typeface="Cambria Math" panose="02040503050406030204" pitchFamily="18" charset="0"/>
+                      </a:rPr>
+                      <m:t>000</m:t>
                     </m:r>
                     <m:r>
                       <m:rPr>
@@ -17614,7 +17852,37 @@
                       <a:rPr lang="en-US" altLang="zh-CN">
                         <a:latin typeface="Cambria Math" panose="02040503050406030204" pitchFamily="18" charset="0"/>
                       </a:rPr>
-                      <m:t>=7,000,000</m:t>
+                      <m:t>=</m:t>
+                    </m:r>
+                    <m:r>
+                      <a:rPr lang="en-US" altLang="zh-CN">
+                        <a:latin typeface="Cambria Math" panose="02040503050406030204" pitchFamily="18" charset="0"/>
+                      </a:rPr>
+                      <m:t>7</m:t>
+                    </m:r>
+                    <m:r>
+                      <a:rPr lang="en-US" altLang="zh-CN">
+                        <a:latin typeface="Cambria Math" panose="02040503050406030204" pitchFamily="18" charset="0"/>
+                      </a:rPr>
+                      <m:t>,</m:t>
+                    </m:r>
+                    <m:r>
+                      <a:rPr lang="en-US" altLang="zh-CN">
+                        <a:latin typeface="Cambria Math" panose="02040503050406030204" pitchFamily="18" charset="0"/>
+                      </a:rPr>
+                      <m:t>000</m:t>
+                    </m:r>
+                    <m:r>
+                      <a:rPr lang="en-US" altLang="zh-CN">
+                        <a:latin typeface="Cambria Math" panose="02040503050406030204" pitchFamily="18" charset="0"/>
+                      </a:rPr>
+                      <m:t>,</m:t>
+                    </m:r>
+                    <m:r>
+                      <a:rPr lang="en-US" altLang="zh-CN">
+                        <a:latin typeface="Cambria Math" panose="02040503050406030204" pitchFamily="18" charset="0"/>
+                      </a:rPr>
+                      <m:t>000</m:t>
                     </m:r>
                     <m:r>
                       <m:rPr>
@@ -17686,7 +17954,31 @@
                           <a:rPr lang="en-US" altLang="zh-CN">
                             <a:latin typeface="Cambria Math" panose="02040503050406030204" pitchFamily="18" charset="0"/>
                           </a:rPr>
-                          <m:t>7,000,000</m:t>
+                          <m:t>7</m:t>
+                        </m:r>
+                        <m:r>
+                          <a:rPr lang="en-US" altLang="zh-CN">
+                            <a:latin typeface="Cambria Math" panose="02040503050406030204" pitchFamily="18" charset="0"/>
+                          </a:rPr>
+                          <m:t>,</m:t>
+                        </m:r>
+                        <m:r>
+                          <a:rPr lang="en-US" altLang="zh-CN">
+                            <a:latin typeface="Cambria Math" panose="02040503050406030204" pitchFamily="18" charset="0"/>
+                          </a:rPr>
+                          <m:t>000</m:t>
+                        </m:r>
+                        <m:r>
+                          <a:rPr lang="en-US" altLang="zh-CN">
+                            <a:latin typeface="Cambria Math" panose="02040503050406030204" pitchFamily="18" charset="0"/>
+                          </a:rPr>
+                          <m:t>,</m:t>
+                        </m:r>
+                        <m:r>
+                          <a:rPr lang="en-US" altLang="zh-CN">
+                            <a:latin typeface="Cambria Math" panose="02040503050406030204" pitchFamily="18" charset="0"/>
+                          </a:rPr>
+                          <m:t>000</m:t>
                         </m:r>
                         <m:r>
                           <m:rPr>
@@ -17708,7 +18000,13 @@
                           <a:rPr lang="en-US" altLang="zh-CN">
                             <a:latin typeface="Cambria Math" panose="02040503050406030204" pitchFamily="18" charset="0"/>
                           </a:rPr>
-                          <m:t>2×</m:t>
+                          <m:t>2</m:t>
+                        </m:r>
+                        <m:r>
+                          <a:rPr lang="en-US" altLang="zh-CN">
+                            <a:latin typeface="Cambria Math" panose="02040503050406030204" pitchFamily="18" charset="0"/>
+                          </a:rPr>
+                          <m:t>×</m:t>
                         </m:r>
                         <m:sSup>
                           <m:sSupPr>
@@ -17769,7 +18067,25 @@
                       <a:rPr lang="en-US" altLang="zh-CN">
                         <a:latin typeface="Cambria Math" panose="02040503050406030204" pitchFamily="18" charset="0"/>
                       </a:rPr>
-                      <m:t>=0.035</m:t>
+                      <m:t>=</m:t>
+                    </m:r>
+                    <m:r>
+                      <a:rPr lang="en-US" altLang="zh-CN">
+                        <a:latin typeface="Cambria Math" panose="02040503050406030204" pitchFamily="18" charset="0"/>
+                      </a:rPr>
+                      <m:t>0</m:t>
+                    </m:r>
+                    <m:r>
+                      <a:rPr lang="en-US" altLang="zh-CN">
+                        <a:latin typeface="Cambria Math" panose="02040503050406030204" pitchFamily="18" charset="0"/>
+                      </a:rPr>
+                      <m:t>.</m:t>
+                    </m:r>
+                    <m:r>
+                      <a:rPr lang="en-US" altLang="zh-CN">
+                        <a:latin typeface="Cambria Math" panose="02040503050406030204" pitchFamily="18" charset="0"/>
+                      </a:rPr>
+                      <m:t>035</m:t>
                     </m:r>
                     <m:r>
                       <m:rPr>
@@ -17987,7 +18303,31 @@
                       <a:rPr lang="en-US" altLang="zh-CN">
                         <a:latin typeface="Cambria Math" panose="02040503050406030204" pitchFamily="18" charset="0"/>
                       </a:rPr>
-                      <m:t>3×1.2</m:t>
+                      <m:t>3</m:t>
+                    </m:r>
+                    <m:r>
+                      <a:rPr lang="en-US" altLang="zh-CN">
+                        <a:latin typeface="Cambria Math" panose="02040503050406030204" pitchFamily="18" charset="0"/>
+                      </a:rPr>
+                      <m:t>×</m:t>
+                    </m:r>
+                    <m:r>
+                      <a:rPr lang="en-US" altLang="zh-CN">
+                        <a:latin typeface="Cambria Math" panose="02040503050406030204" pitchFamily="18" charset="0"/>
+                      </a:rPr>
+                      <m:t>1</m:t>
+                    </m:r>
+                    <m:r>
+                      <a:rPr lang="en-US" altLang="zh-CN">
+                        <a:latin typeface="Cambria Math" panose="02040503050406030204" pitchFamily="18" charset="0"/>
+                      </a:rPr>
+                      <m:t>.</m:t>
+                    </m:r>
+                    <m:r>
+                      <a:rPr lang="en-US" altLang="zh-CN">
+                        <a:latin typeface="Cambria Math" panose="02040503050406030204" pitchFamily="18" charset="0"/>
+                      </a:rPr>
+                      <m:t>2</m:t>
                     </m:r>
                     <m:r>
                       <m:rPr>
@@ -18007,7 +18347,25 @@
                       <a:rPr lang="en-US" altLang="zh-CN">
                         <a:latin typeface="Cambria Math" panose="02040503050406030204" pitchFamily="18" charset="0"/>
                       </a:rPr>
-                      <m:t>=3.6</m:t>
+                      <m:t>=</m:t>
+                    </m:r>
+                    <m:r>
+                      <a:rPr lang="en-US" altLang="zh-CN">
+                        <a:latin typeface="Cambria Math" panose="02040503050406030204" pitchFamily="18" charset="0"/>
+                      </a:rPr>
+                      <m:t>3</m:t>
+                    </m:r>
+                    <m:r>
+                      <a:rPr lang="en-US" altLang="zh-CN">
+                        <a:latin typeface="Cambria Math" panose="02040503050406030204" pitchFamily="18" charset="0"/>
+                      </a:rPr>
+                      <m:t>.</m:t>
+                    </m:r>
+                    <m:r>
+                      <a:rPr lang="en-US" altLang="zh-CN">
+                        <a:latin typeface="Cambria Math" panose="02040503050406030204" pitchFamily="18" charset="0"/>
+                      </a:rPr>
+                      <m:t>6</m:t>
                     </m:r>
                     <m:r>
                       <m:rPr>
@@ -18064,7 +18422,25 @@
                       <a:rPr lang="en-US" altLang="zh-CN">
                         <a:latin typeface="Cambria Math" panose="02040503050406030204" pitchFamily="18" charset="0"/>
                       </a:rPr>
-                      <m:t>=3.6</m:t>
+                      <m:t>=</m:t>
+                    </m:r>
+                    <m:r>
+                      <a:rPr lang="en-US" altLang="zh-CN">
+                        <a:latin typeface="Cambria Math" panose="02040503050406030204" pitchFamily="18" charset="0"/>
+                      </a:rPr>
+                      <m:t>3</m:t>
+                    </m:r>
+                    <m:r>
+                      <a:rPr lang="en-US" altLang="zh-CN">
+                        <a:latin typeface="Cambria Math" panose="02040503050406030204" pitchFamily="18" charset="0"/>
+                      </a:rPr>
+                      <m:t>.</m:t>
+                    </m:r>
+                    <m:r>
+                      <a:rPr lang="en-US" altLang="zh-CN">
+                        <a:latin typeface="Cambria Math" panose="02040503050406030204" pitchFamily="18" charset="0"/>
+                      </a:rPr>
+                      <m:t>6</m:t>
                     </m:r>
                     <m:r>
                       <m:rPr>
@@ -18084,7 +18460,13 @@
                       <a:rPr lang="en-US" altLang="zh-CN">
                         <a:latin typeface="Cambria Math" panose="02040503050406030204" pitchFamily="18" charset="0"/>
                       </a:rPr>
-                      <m:t>+35</m:t>
+                      <m:t>+</m:t>
+                    </m:r>
+                    <m:r>
+                      <a:rPr lang="en-US" altLang="zh-CN">
+                        <a:latin typeface="Cambria Math" panose="02040503050406030204" pitchFamily="18" charset="0"/>
+                      </a:rPr>
+                      <m:t>35</m:t>
                     </m:r>
                     <m:r>
                       <m:rPr>

--- a/Exams/CSC175  Sp26 Midterm Sample Questions.pptx
+++ b/Exams/CSC175  Sp26 Midterm Sample Questions.pptx
@@ -649,7 +649,7 @@
             <a:fld id="{2AEAFE1F-9E52-45C8-9793-E819F0044A1C}" type="datetimeFigureOut">
               <a:rPr lang="en-US" smtClean="0"/>
               <a:pPr/>
-              <a:t>3/31/2026</a:t>
+              <a:t>4/6/2026</a:t>
             </a:fld>
             <a:endParaRPr lang="en-US"/>
           </a:p>
@@ -1172,7 +1172,7 @@
             <a:fld id="{2E26774B-6488-4259-9342-6CBDB2BFD4E4}" type="datetime1">
               <a:rPr lang="en-US" smtClean="0"/>
               <a:pPr eaLnBrk="1" latinLnBrk="0" hangingPunct="1"/>
-              <a:t>3/31/2026</a:t>
+              <a:t>4/6/2026</a:t>
             </a:fld>
             <a:endParaRPr lang="en-US" sz="1600" dirty="0"/>
           </a:p>
@@ -1533,7 +1533,7 @@
             <a:fld id="{9B2E7711-0BE3-4AFC-959B-CB5C31A7AE48}" type="datetime1">
               <a:rPr lang="en-US" smtClean="0"/>
               <a:pPr eaLnBrk="1" latinLnBrk="0" hangingPunct="1"/>
-              <a:t>3/31/2026</a:t>
+              <a:t>4/6/2026</a:t>
             </a:fld>
             <a:endParaRPr lang="en-US"/>
           </a:p>
@@ -1710,7 +1710,7 @@
             <a:fld id="{825AAB62-A572-4E37-B772-B4A75ADE0B18}" type="datetime1">
               <a:rPr lang="en-US" smtClean="0"/>
               <a:pPr eaLnBrk="1" latinLnBrk="0" hangingPunct="1"/>
-              <a:t>3/31/2026</a:t>
+              <a:t>4/6/2026</a:t>
             </a:fld>
             <a:endParaRPr lang="en-US"/>
           </a:p>
@@ -1947,7 +1947,7 @@
             <a:fld id="{B0F52420-10F8-488E-969A-A9BE388BE9C4}" type="datetime1">
               <a:rPr lang="en-US" smtClean="0"/>
               <a:pPr eaLnBrk="1" latinLnBrk="0" hangingPunct="1"/>
-              <a:t>3/31/2026</a:t>
+              <a:t>4/6/2026</a:t>
             </a:fld>
             <a:endParaRPr lang="en-US" dirty="0"/>
           </a:p>
@@ -2218,7 +2218,7 @@
             <a:fld id="{96E96F24-58CF-47DA-907C-A9CD6353E425}" type="datetime1">
               <a:rPr lang="en-US" smtClean="0"/>
               <a:pPr eaLnBrk="1" latinLnBrk="0" hangingPunct="1"/>
-              <a:t>3/31/2026</a:t>
+              <a:t>4/6/2026</a:t>
             </a:fld>
             <a:endParaRPr lang="en-US" dirty="0"/>
           </a:p>
@@ -2440,7 +2440,7 @@
             <a:fld id="{53AE4463-726A-4A35-9F46-98893432A3F9}" type="datetime1">
               <a:rPr lang="en-US" smtClean="0"/>
               <a:pPr eaLnBrk="1" latinLnBrk="0" hangingPunct="1"/>
-              <a:t>3/31/2026</a:t>
+              <a:t>4/6/2026</a:t>
             </a:fld>
             <a:endParaRPr lang="en-US"/>
           </a:p>
@@ -2794,7 +2794,7 @@
             <a:fld id="{FDF404D0-E306-4E90-90E3-E44D26246FFC}" type="datetime1">
               <a:rPr lang="en-US" smtClean="0"/>
               <a:pPr eaLnBrk="1" latinLnBrk="0" hangingPunct="1"/>
-              <a:t>3/31/2026</a:t>
+              <a:t>4/6/2026</a:t>
             </a:fld>
             <a:endParaRPr lang="en-US"/>
           </a:p>
@@ -3028,7 +3028,7 @@
             <a:fld id="{1485DA14-76F0-4D93-83FB-7878C79A1986}" type="datetime1">
               <a:rPr lang="en-US" smtClean="0"/>
               <a:pPr eaLnBrk="1" latinLnBrk="0" hangingPunct="1"/>
-              <a:t>3/31/2026</a:t>
+              <a:t>4/6/2026</a:t>
             </a:fld>
             <a:endParaRPr lang="en-US"/>
           </a:p>
@@ -3171,7 +3171,7 @@
             <a:fld id="{A15E552D-49E1-496B-B79C-E100986B8B5F}" type="datetime1">
               <a:rPr lang="en-US" smtClean="0"/>
               <a:pPr eaLnBrk="1" latinLnBrk="0" hangingPunct="1"/>
-              <a:t>3/31/2026</a:t>
+              <a:t>4/6/2026</a:t>
             </a:fld>
             <a:endParaRPr lang="en-US"/>
           </a:p>
@@ -3450,7 +3450,7 @@
             <a:fld id="{CEC72505-1551-4A98-97CD-F520B07184AD}" type="datetime1">
               <a:rPr lang="en-US" smtClean="0"/>
               <a:pPr eaLnBrk="1" latinLnBrk="0" hangingPunct="1"/>
-              <a:t>3/31/2026</a:t>
+              <a:t>4/6/2026</a:t>
             </a:fld>
             <a:endParaRPr lang="en-US"/>
           </a:p>
@@ -3859,7 +3859,7 @@
             <a:fld id="{7218F47B-BA16-4F20-B5BA-73F598D94B51}" type="datetime1">
               <a:rPr lang="en-US" smtClean="0"/>
               <a:pPr eaLnBrk="1" latinLnBrk="0" hangingPunct="1"/>
-              <a:t>3/31/2026</a:t>
+              <a:t>4/6/2026</a:t>
             </a:fld>
             <a:endParaRPr lang="en-US"/>
           </a:p>
@@ -4198,7 +4198,7 @@
             <a:fld id="{4F3CB514-9CA6-4E48-9463-A430D31CFDE3}" type="datetime1">
               <a:rPr lang="en-US" smtClean="0"/>
               <a:pPr eaLnBrk="1" latinLnBrk="0" hangingPunct="1"/>
-              <a:t>3/31/2026</a:t>
+              <a:t>4/6/2026</a:t>
             </a:fld>
             <a:endParaRPr lang="en-US" sz="1400" dirty="0">
               <a:solidFill>
@@ -8339,12 +8339,12 @@
         <p:spPr>
           <a:xfrm>
             <a:off x="609600" y="1219200"/>
-            <a:ext cx="10972800" cy="3154680"/>
+            <a:ext cx="10972800" cy="3657600"/>
           </a:xfrm>
         </p:spPr>
         <p:txBody>
           <a:bodyPr>
-            <a:normAutofit fontScale="70000" lnSpcReduction="20000"/>
+            <a:normAutofit fontScale="62500" lnSpcReduction="20000"/>
           </a:bodyPr>
           <a:lstStyle/>
           <a:p>
@@ -8412,21 +8412,21 @@
             </a:r>
             <a:r>
               <a:rPr lang="en-US" altLang="zh-CN" dirty="0"/>
-              <a:t>= 0.</a:t>
+              <a:t>= 0. (Simplifying assumption assuming synchronized clocks for all routers.)</a:t>
             </a:r>
           </a:p>
           <a:p>
             <a:pPr lvl="1"/>
             <a:r>
               <a:rPr lang="en-US" altLang="zh-CN" dirty="0"/>
-              <a:t>Routing table entries expire after 10 seconds of receiving no advertisements.</a:t>
+              <a:t>Routing table entries expire after TTL=10 seconds of receiving no advertisements.</a:t>
             </a:r>
           </a:p>
           <a:p>
             <a:pPr lvl="1"/>
             <a:r>
               <a:rPr lang="en-US" altLang="zh-CN" dirty="0"/>
-              <a:t>Every second, each router (1) expires routes, then (2) processes advertisements and updates its table, then (3) sends out advertisements if </a:t>
+              <a:t>Every second, each router (1) expires routes based on TTL, then (2) processes advertisements and updates its table, then (3) sends out advertisements if </a:t>
             </a:r>
             <a:r>
               <a:rPr lang="zh-CN" altLang="en-US" dirty="0"/>
@@ -8434,7 +8434,7 @@
             </a:r>
             <a:r>
               <a:rPr lang="en-US" altLang="zh-CN" dirty="0"/>
-              <a:t>is even.</a:t>
+              <a:t>is even (every 2 seconds).</a:t>
             </a:r>
           </a:p>
           <a:p>
@@ -8453,7 +8453,7 @@
           <a:p>
             <a:r>
               <a:rPr lang="en-US" altLang="zh-CN" dirty="0"/>
-              <a:t>After the network converges, the R1 - R2 link is broken, and split horizon is enabled on all routers.</a:t>
+              <a:t>After the network converges, the R1 - R2 link is broken, and split horizon is enabled on all routers. </a:t>
             </a:r>
           </a:p>
           <a:p>
@@ -8461,10 +8461,34 @@
               <a:rPr lang="en-US" altLang="zh-CN" dirty="0"/>
               <a:t>Q2 Fill in R1’s table at the new steady state after the R1 - R2 link is broken.</a:t>
             </a:r>
-            <a:br>
-              <a:rPr lang="en-US" altLang="zh-CN" dirty="0"/>
-            </a:br>
-            <a:endParaRPr lang="en-US" altLang="zh-CN" dirty="0"/>
+          </a:p>
+          <a:p>
+            <a:r>
+              <a:rPr lang="en-US" altLang="zh-CN" sz="2800" dirty="0"/>
+              <a:t>Q3 Suppose R1’s original table entry for destination </a:t>
+            </a:r>
+            <a:r>
+              <a:rPr lang="zh-CN" altLang="en-US" sz="2800" dirty="0"/>
+              <a:t>𝐶 </a:t>
+            </a:r>
+            <a:r>
+              <a:rPr lang="en-US" altLang="zh-CN" sz="2800" dirty="0"/>
+              <a:t>expires at </a:t>
+            </a:r>
+            <a:r>
+              <a:rPr lang="zh-CN" altLang="en-US" sz="2800" dirty="0"/>
+              <a:t>𝑡 </a:t>
+            </a:r>
+            <a:r>
+              <a:rPr lang="en-US" altLang="zh-CN" sz="2800" dirty="0"/>
+              <a:t>= 20. At what time step does R1’s table reach the new steady state in Q2? Assume split horizon but no route poisoning.</a:t>
+            </a:r>
+          </a:p>
+          <a:p>
+            <a:r>
+              <a:rPr lang="en-US" altLang="zh-CN" sz="2700" dirty="0"/>
+              <a:t>Q4 Redo Q3 assuming both split horizon and route poisoning.</a:t>
+            </a:r>
           </a:p>
         </p:txBody>
       </p:sp>
@@ -8490,7 +8514,7 @@
         </p:blipFill>
         <p:spPr>
           <a:xfrm>
-            <a:off x="76199" y="4648200"/>
+            <a:off x="76199" y="4743176"/>
             <a:ext cx="5872765" cy="1581424"/>
           </a:xfrm>
           <a:prstGeom prst="rect">
@@ -8520,7 +8544,7 @@
         </p:blipFill>
         <p:spPr>
           <a:xfrm>
-            <a:off x="6091656" y="4598136"/>
+            <a:off x="6091656" y="4693112"/>
             <a:ext cx="5721383" cy="1631488"/>
           </a:xfrm>
           <a:prstGeom prst="rect">
@@ -8636,53 +8660,53 @@
         <p:spPr>
           <a:xfrm>
             <a:off x="609600" y="1219200"/>
-            <a:ext cx="5791200" cy="5137150"/>
+            <a:ext cx="5791200" cy="5486400"/>
           </a:xfrm>
         </p:spPr>
         <p:txBody>
           <a:bodyPr>
-            <a:normAutofit fontScale="55000" lnSpcReduction="20000"/>
+            <a:normAutofit fontScale="92500" lnSpcReduction="10000"/>
           </a:bodyPr>
           <a:lstStyle/>
           <a:p>
             <a:r>
-              <a:rPr lang="en-US" altLang="zh-CN" dirty="0"/>
+              <a:rPr lang="en-US" altLang="zh-CN" sz="1600" dirty="0"/>
               <a:t>Consider the following network graph with three hosts (A, B, C) and six routers (R1 - R6). For the following questions, assume that the routers run a link-state routing protocol and the routing state has converged. Every link is up unless otherwise noted. When picking between equal-cost paths, the routers pick the route through the neighbor with the lower ID number. For each answer, please provide a concise explanation.</a:t>
             </a:r>
           </a:p>
           <a:p>
             <a:pPr lvl="1"/>
             <a:r>
-              <a:rPr lang="en-US" altLang="zh-CN" dirty="0"/>
+              <a:rPr lang="en-US" altLang="zh-CN" sz="1400" dirty="0"/>
               <a:t>Note that all subparts are independent questions (changes made in one subpart do not affect the subsequent ones).</a:t>
             </a:r>
           </a:p>
           <a:p>
             <a:r>
-              <a:rPr lang="en-US" altLang="zh-CN" dirty="0"/>
+              <a:rPr lang="en-US" altLang="zh-CN" sz="1600" dirty="0"/>
               <a:t>Q1. Suppose that the link between R3 and R4 goes down. R3 and R4 have recomputed their routes, but they have not yet sent updates.  What route will a packet from A to C take?</a:t>
             </a:r>
           </a:p>
           <a:p>
             <a:r>
-              <a:rPr lang="en-US" altLang="zh-CN" dirty="0"/>
+              <a:rPr lang="en-US" altLang="zh-CN" sz="1600" dirty="0"/>
               <a:t>Q2. Suppose that the link between R2 and R3 goes down. R2 and R3 have recomputed their routes, but have not yet sent updates.  What route will a packet from A to C take? </a:t>
             </a:r>
           </a:p>
           <a:p>
             <a:r>
-              <a:rPr lang="en-US" altLang="zh-CN" dirty="0"/>
+              <a:rPr lang="en-US" altLang="zh-CN" sz="1600" dirty="0"/>
               <a:t>Q3.  Assume that at time t=0, A sends a packet to C. At t=0.5 seconds, the link between R4 and R5 goes down, and R4 and R5 instantaneously recognize and recompute their routes. Assume that link-state advertisements are processed and propagated instantaneously. A link’s propagation delay is equal to the link costs in the diagram (in seconds), i.e. R1 - R2 has a 1-second delay, R2 - R3 has 2-second delay, </a:t>
             </a:r>
             <a:r>
-              <a:rPr lang="en-US" altLang="zh-CN" dirty="0" err="1"/>
+              <a:rPr lang="en-US" altLang="zh-CN" sz="1600" dirty="0" err="1"/>
               <a:t>etc</a:t>
             </a:r>
             <a:r>
-              <a:rPr lang="en-US" altLang="zh-CN" dirty="0"/>
+              <a:rPr lang="en-US" altLang="zh-CN" sz="1600" dirty="0"/>
               <a:t>). You can ignore all processing and queuing delays. Does the packet reach its destination? If so, write down the route the packet from A to C takes.</a:t>
             </a:r>
-            <a:endParaRPr lang="zh-CN" altLang="en-US" dirty="0"/>
+            <a:endParaRPr lang="zh-CN" altLang="en-US" sz="1600" dirty="0"/>
           </a:p>
         </p:txBody>
       </p:sp>
